--- a/exports/pptx/lessons/senior-module-02-panchabhuta/day-05-primary-source.pptx
+++ b/exports/pptx/lessons/senior-module-02-panchabhuta/day-05-primary-source.pptx
@@ -3224,7 +3224,7 @@
         </p:nvSpPr>
         <p:spPr>
           <a:xfrm>
-            <a:off x="406301" y="5199311"/>
+            <a:off x="406301" y="1927175"/>
             <a:ext cx="8498026" cy="213271"/>
           </a:xfrm>
           <a:prstGeom prst="rect">
@@ -3250,15 +3250,15 @@
               <a:buNone/>
             </a:pPr>
             <a:r>
-              <a:rPr lang="en-US" sz="1200" dirty="0">
-                <a:solidFill>
-                  <a:srgbClr val="1A1A1A"/>
-                </a:solidFill>
-                <a:latin typeface="Georgia" pitchFamily="34" charset="0"/>
-                <a:ea typeface="Georgia" pitchFamily="34" charset="-122"/>
-                <a:cs typeface="Georgia" pitchFamily="34" charset="-120"/>
-              </a:rPr>
-              <a:t>Continuous translation:    &gt; "Softness, hardness, cold and heat — these are the touch-ness of touch, the subtle essence of air."</a:t>
+              <a:rPr lang="en-US" sz="1200" i="1" dirty="0">
+                <a:solidFill>
+                  <a:srgbClr val="1A1A1A"/>
+                </a:solidFill>
+                <a:latin typeface="Georgia" pitchFamily="34" charset="0"/>
+                <a:ea typeface="Georgia" pitchFamily="34" charset="-122"/>
+                <a:cs typeface="Georgia" pitchFamily="34" charset="-120"/>
+              </a:rPr>
+              <a:t>Each row: Sanskrit · Gloss.</a:t>
             </a:r>
             <a:endParaRPr lang="en-US" sz="1200" dirty="0"/>
           </a:p>
@@ -3272,7 +3272,561 @@
         </p:nvSpPr>
         <p:spPr>
           <a:xfrm>
-            <a:off x="634901" y="5501432"/>
+            <a:off x="634901" y="2229296"/>
+            <a:ext cx="8102798" cy="2719685"/>
+          </a:xfrm>
+          <a:prstGeom prst="rect">
+            <a:avLst/>
+          </a:prstGeom>
+          <a:noFill/>
+          <a:ln/>
+        </p:spPr>
+        <p:txBody>
+          <a:bodyPr wrap="square" lIns="0" tIns="0" rIns="0" bIns="0" rtlCol="0" anchor="t"/>
+          <a:lstStyle/>
+          <a:p>
+            <a:pPr algn="l" marL="342900" indent="-342900">
+              <a:lnSpc>
+                <a:spcPts val="1620"/>
+              </a:lnSpc>
+              <a:spcAft>
+                <a:spcPts val="300"/>
+              </a:spcAft>
+              <a:buSzPct val="100000"/>
+              <a:buChar char="•"/>
+            </a:pPr>
+            <a:r>
+              <a:rPr lang="en-US" sz="1200" b="1" dirty="0">
+                <a:solidFill>
+                  <a:srgbClr val="1A1A1A"/>
+                </a:solidFill>
+                <a:latin typeface="Georgia" pitchFamily="34" charset="0"/>
+                <a:ea typeface="Georgia" pitchFamily="34" charset="-122"/>
+                <a:cs typeface="Georgia" pitchFamily="34" charset="-120"/>
+              </a:rPr>
+              <a:t>mṛdutvam</a:t>
+            </a:r>
+            <a:pPr algn="l" indent="0" marL="0">
+              <a:lnSpc>
+                <a:spcPts val="1620"/>
+              </a:lnSpc>
+              <a:spcAft>
+                <a:spcPts val="300"/>
+              </a:spcAft>
+              <a:buNone/>
+            </a:pPr>
+            <a:r>
+              <a:rPr lang="en-US" sz="1200" dirty="0">
+                <a:solidFill>
+                  <a:srgbClr val="1A1A1A"/>
+                </a:solidFill>
+                <a:latin typeface="Georgia" pitchFamily="34" charset="0"/>
+                <a:ea typeface="Georgia" pitchFamily="34" charset="-122"/>
+                <a:cs typeface="Georgia" pitchFamily="34" charset="-120"/>
+              </a:rPr>
+              <a:t> — softness (nominative neuter)</a:t>
+            </a:r>
+            <a:endParaRPr lang="en-US" sz="1200" dirty="0"/>
+          </a:p>
+          <a:p>
+            <a:pPr algn="l" marL="342900" indent="-342900">
+              <a:lnSpc>
+                <a:spcPts val="1620"/>
+              </a:lnSpc>
+              <a:spcAft>
+                <a:spcPts val="300"/>
+              </a:spcAft>
+              <a:buSzPct val="100000"/>
+              <a:buChar char="•"/>
+            </a:pPr>
+            <a:r>
+              <a:rPr lang="en-US" sz="1200" b="1" dirty="0">
+                <a:solidFill>
+                  <a:srgbClr val="1A1A1A"/>
+                </a:solidFill>
+                <a:latin typeface="Georgia" pitchFamily="34" charset="0"/>
+                <a:ea typeface="Georgia" pitchFamily="34" charset="-122"/>
+                <a:cs typeface="Georgia" pitchFamily="34" charset="-120"/>
+              </a:rPr>
+              <a:t>kaṭhinatvam</a:t>
+            </a:r>
+            <a:pPr algn="l" indent="0" marL="0">
+              <a:lnSpc>
+                <a:spcPts val="1620"/>
+              </a:lnSpc>
+              <a:spcAft>
+                <a:spcPts val="300"/>
+              </a:spcAft>
+              <a:buNone/>
+            </a:pPr>
+            <a:r>
+              <a:rPr lang="en-US" sz="1200" dirty="0">
+                <a:solidFill>
+                  <a:srgbClr val="1A1A1A"/>
+                </a:solidFill>
+                <a:latin typeface="Georgia" pitchFamily="34" charset="0"/>
+                <a:ea typeface="Georgia" pitchFamily="34" charset="-122"/>
+                <a:cs typeface="Georgia" pitchFamily="34" charset="-120"/>
+              </a:rPr>
+              <a:t> — hardness</a:t>
+            </a:r>
+            <a:endParaRPr lang="en-US" sz="1200" dirty="0"/>
+          </a:p>
+          <a:p>
+            <a:pPr algn="l" marL="342900" indent="-342900">
+              <a:lnSpc>
+                <a:spcPts val="1620"/>
+              </a:lnSpc>
+              <a:spcAft>
+                <a:spcPts val="300"/>
+              </a:spcAft>
+              <a:buSzPct val="100000"/>
+              <a:buChar char="•"/>
+            </a:pPr>
+            <a:r>
+              <a:rPr lang="en-US" sz="1200" b="1" dirty="0">
+                <a:solidFill>
+                  <a:srgbClr val="1A1A1A"/>
+                </a:solidFill>
+                <a:latin typeface="Georgia" pitchFamily="34" charset="0"/>
+                <a:ea typeface="Georgia" pitchFamily="34" charset="-122"/>
+                <a:cs typeface="Georgia" pitchFamily="34" charset="-120"/>
+              </a:rPr>
+              <a:t>ca</a:t>
+            </a:r>
+            <a:pPr algn="l" indent="0" marL="0">
+              <a:lnSpc>
+                <a:spcPts val="1620"/>
+              </a:lnSpc>
+              <a:spcAft>
+                <a:spcPts val="300"/>
+              </a:spcAft>
+              <a:buNone/>
+            </a:pPr>
+            <a:r>
+              <a:rPr lang="en-US" sz="1200" dirty="0">
+                <a:solidFill>
+                  <a:srgbClr val="1A1A1A"/>
+                </a:solidFill>
+                <a:latin typeface="Georgia" pitchFamily="34" charset="0"/>
+                <a:ea typeface="Georgia" pitchFamily="34" charset="-122"/>
+                <a:cs typeface="Georgia" pitchFamily="34" charset="-120"/>
+              </a:rPr>
+              <a:t> — and</a:t>
+            </a:r>
+            <a:endParaRPr lang="en-US" sz="1200" dirty="0"/>
+          </a:p>
+          <a:p>
+            <a:pPr algn="l" marL="342900" indent="-342900">
+              <a:lnSpc>
+                <a:spcPts val="1620"/>
+              </a:lnSpc>
+              <a:spcAft>
+                <a:spcPts val="300"/>
+              </a:spcAft>
+              <a:buSzPct val="100000"/>
+              <a:buChar char="•"/>
+            </a:pPr>
+            <a:r>
+              <a:rPr lang="en-US" sz="1200" b="1" dirty="0">
+                <a:solidFill>
+                  <a:srgbClr val="1A1A1A"/>
+                </a:solidFill>
+                <a:latin typeface="Georgia" pitchFamily="34" charset="0"/>
+                <a:ea typeface="Georgia" pitchFamily="34" charset="-122"/>
+                <a:cs typeface="Georgia" pitchFamily="34" charset="-120"/>
+              </a:rPr>
+              <a:t>śaityam</a:t>
+            </a:r>
+            <a:pPr algn="l" indent="0" marL="0">
+              <a:lnSpc>
+                <a:spcPts val="1620"/>
+              </a:lnSpc>
+              <a:spcAft>
+                <a:spcPts val="300"/>
+              </a:spcAft>
+              <a:buNone/>
+            </a:pPr>
+            <a:r>
+              <a:rPr lang="en-US" sz="1200" dirty="0">
+                <a:solidFill>
+                  <a:srgbClr val="1A1A1A"/>
+                </a:solidFill>
+                <a:latin typeface="Georgia" pitchFamily="34" charset="0"/>
+                <a:ea typeface="Georgia" pitchFamily="34" charset="-122"/>
+                <a:cs typeface="Georgia" pitchFamily="34" charset="-120"/>
+              </a:rPr>
+              <a:t> — cold</a:t>
+            </a:r>
+            <a:endParaRPr lang="en-US" sz="1200" dirty="0"/>
+          </a:p>
+          <a:p>
+            <a:pPr algn="l" marL="342900" indent="-342900">
+              <a:lnSpc>
+                <a:spcPts val="1620"/>
+              </a:lnSpc>
+              <a:spcAft>
+                <a:spcPts val="300"/>
+              </a:spcAft>
+              <a:buSzPct val="100000"/>
+              <a:buChar char="•"/>
+            </a:pPr>
+            <a:r>
+              <a:rPr lang="en-US" sz="1200" b="1" dirty="0">
+                <a:solidFill>
+                  <a:srgbClr val="1A1A1A"/>
+                </a:solidFill>
+                <a:latin typeface="Georgia" pitchFamily="34" charset="0"/>
+                <a:ea typeface="Georgia" pitchFamily="34" charset="-122"/>
+                <a:cs typeface="Georgia" pitchFamily="34" charset="-120"/>
+              </a:rPr>
+              <a:t>uṣṇatvam</a:t>
+            </a:r>
+            <a:pPr algn="l" indent="0" marL="0">
+              <a:lnSpc>
+                <a:spcPts val="1620"/>
+              </a:lnSpc>
+              <a:spcAft>
+                <a:spcPts val="300"/>
+              </a:spcAft>
+              <a:buNone/>
+            </a:pPr>
+            <a:r>
+              <a:rPr lang="en-US" sz="1200" dirty="0">
+                <a:solidFill>
+                  <a:srgbClr val="1A1A1A"/>
+                </a:solidFill>
+                <a:latin typeface="Georgia" pitchFamily="34" charset="0"/>
+                <a:ea typeface="Georgia" pitchFamily="34" charset="-122"/>
+                <a:cs typeface="Georgia" pitchFamily="34" charset="-120"/>
+              </a:rPr>
+              <a:t> — heat</a:t>
+            </a:r>
+            <a:endParaRPr lang="en-US" sz="1200" dirty="0"/>
+          </a:p>
+          <a:p>
+            <a:pPr algn="l" marL="342900" indent="-342900">
+              <a:lnSpc>
+                <a:spcPts val="1620"/>
+              </a:lnSpc>
+              <a:spcAft>
+                <a:spcPts val="300"/>
+              </a:spcAft>
+              <a:buSzPct val="100000"/>
+              <a:buChar char="•"/>
+            </a:pPr>
+            <a:r>
+              <a:rPr lang="en-US" sz="1200" b="1" dirty="0">
+                <a:solidFill>
+                  <a:srgbClr val="1A1A1A"/>
+                </a:solidFill>
+                <a:latin typeface="Georgia" pitchFamily="34" charset="0"/>
+                <a:ea typeface="Georgia" pitchFamily="34" charset="-122"/>
+                <a:cs typeface="Georgia" pitchFamily="34" charset="-120"/>
+              </a:rPr>
+              <a:t>eva ca</a:t>
+            </a:r>
+            <a:pPr algn="l" indent="0" marL="0">
+              <a:lnSpc>
+                <a:spcPts val="1620"/>
+              </a:lnSpc>
+              <a:spcAft>
+                <a:spcPts val="300"/>
+              </a:spcAft>
+              <a:buNone/>
+            </a:pPr>
+            <a:r>
+              <a:rPr lang="en-US" sz="1200" dirty="0">
+                <a:solidFill>
+                  <a:srgbClr val="1A1A1A"/>
+                </a:solidFill>
+                <a:latin typeface="Georgia" pitchFamily="34" charset="0"/>
+                <a:ea typeface="Georgia" pitchFamily="34" charset="-122"/>
+                <a:cs typeface="Georgia" pitchFamily="34" charset="-120"/>
+              </a:rPr>
+              <a:t> — as well</a:t>
+            </a:r>
+            <a:endParaRPr lang="en-US" sz="1200" dirty="0"/>
+          </a:p>
+          <a:p>
+            <a:pPr algn="l" marL="342900" indent="-342900">
+              <a:lnSpc>
+                <a:spcPts val="1620"/>
+              </a:lnSpc>
+              <a:spcAft>
+                <a:spcPts val="300"/>
+              </a:spcAft>
+              <a:buSzPct val="100000"/>
+              <a:buChar char="•"/>
+            </a:pPr>
+            <a:r>
+              <a:rPr lang="en-US" sz="1200" b="1" dirty="0">
+                <a:solidFill>
+                  <a:srgbClr val="1A1A1A"/>
+                </a:solidFill>
+                <a:latin typeface="Georgia" pitchFamily="34" charset="0"/>
+                <a:ea typeface="Georgia" pitchFamily="34" charset="-122"/>
+                <a:cs typeface="Georgia" pitchFamily="34" charset="-120"/>
+              </a:rPr>
+              <a:t>etat</a:t>
+            </a:r>
+            <a:pPr algn="l" indent="0" marL="0">
+              <a:lnSpc>
+                <a:spcPts val="1620"/>
+              </a:lnSpc>
+              <a:spcAft>
+                <a:spcPts val="300"/>
+              </a:spcAft>
+              <a:buNone/>
+            </a:pPr>
+            <a:r>
+              <a:rPr lang="en-US" sz="1200" dirty="0">
+                <a:solidFill>
+                  <a:srgbClr val="1A1A1A"/>
+                </a:solidFill>
+                <a:latin typeface="Georgia" pitchFamily="34" charset="0"/>
+                <a:ea typeface="Georgia" pitchFamily="34" charset="-122"/>
+                <a:cs typeface="Georgia" pitchFamily="34" charset="-120"/>
+              </a:rPr>
+              <a:t> — these</a:t>
+            </a:r>
+            <a:endParaRPr lang="en-US" sz="1200" dirty="0"/>
+          </a:p>
+          <a:p>
+            <a:pPr algn="l" marL="342900" indent="-342900">
+              <a:lnSpc>
+                <a:spcPts val="1620"/>
+              </a:lnSpc>
+              <a:spcAft>
+                <a:spcPts val="300"/>
+              </a:spcAft>
+              <a:buSzPct val="100000"/>
+              <a:buChar char="•"/>
+            </a:pPr>
+            <a:r>
+              <a:rPr lang="en-US" sz="1200" b="1" dirty="0">
+                <a:solidFill>
+                  <a:srgbClr val="1A1A1A"/>
+                </a:solidFill>
+                <a:latin typeface="Georgia" pitchFamily="34" charset="0"/>
+                <a:ea typeface="Georgia" pitchFamily="34" charset="-122"/>
+                <a:cs typeface="Georgia" pitchFamily="34" charset="-120"/>
+              </a:rPr>
+              <a:t>sparśasya</a:t>
+            </a:r>
+            <a:pPr algn="l" indent="0" marL="0">
+              <a:lnSpc>
+                <a:spcPts val="1620"/>
+              </a:lnSpc>
+              <a:spcAft>
+                <a:spcPts val="300"/>
+              </a:spcAft>
+              <a:buNone/>
+            </a:pPr>
+            <a:r>
+              <a:rPr lang="en-US" sz="1200" dirty="0">
+                <a:solidFill>
+                  <a:srgbClr val="1A1A1A"/>
+                </a:solidFill>
+                <a:latin typeface="Georgia" pitchFamily="34" charset="0"/>
+                <a:ea typeface="Georgia" pitchFamily="34" charset="-122"/>
+                <a:cs typeface="Georgia" pitchFamily="34" charset="-120"/>
+              </a:rPr>
+              <a:t> — of touch (genitive)</a:t>
+            </a:r>
+            <a:endParaRPr lang="en-US" sz="1200" dirty="0"/>
+          </a:p>
+          <a:p>
+            <a:pPr algn="l" marL="342900" indent="-342900">
+              <a:lnSpc>
+                <a:spcPts val="1620"/>
+              </a:lnSpc>
+              <a:spcAft>
+                <a:spcPts val="300"/>
+              </a:spcAft>
+              <a:buSzPct val="100000"/>
+              <a:buChar char="•"/>
+            </a:pPr>
+            <a:r>
+              <a:rPr lang="en-US" sz="1200" b="1" dirty="0">
+                <a:solidFill>
+                  <a:srgbClr val="1A1A1A"/>
+                </a:solidFill>
+                <a:latin typeface="Georgia" pitchFamily="34" charset="0"/>
+                <a:ea typeface="Georgia" pitchFamily="34" charset="-122"/>
+                <a:cs typeface="Georgia" pitchFamily="34" charset="-120"/>
+              </a:rPr>
+              <a:t>sparśatvam</a:t>
+            </a:r>
+            <a:pPr algn="l" indent="0" marL="0">
+              <a:lnSpc>
+                <a:spcPts val="1620"/>
+              </a:lnSpc>
+              <a:spcAft>
+                <a:spcPts val="300"/>
+              </a:spcAft>
+              <a:buNone/>
+            </a:pPr>
+            <a:r>
+              <a:rPr lang="en-US" sz="1200" dirty="0">
+                <a:solidFill>
+                  <a:srgbClr val="1A1A1A"/>
+                </a:solidFill>
+                <a:latin typeface="Georgia" pitchFamily="34" charset="0"/>
+                <a:ea typeface="Georgia" pitchFamily="34" charset="-122"/>
+                <a:cs typeface="Georgia" pitchFamily="34" charset="-120"/>
+              </a:rPr>
+              <a:t> — the touch-ness (= the defining quality of touch)</a:t>
+            </a:r>
+            <a:endParaRPr lang="en-US" sz="1200" dirty="0"/>
+          </a:p>
+          <a:p>
+            <a:pPr algn="l" marL="342900" indent="-342900">
+              <a:lnSpc>
+                <a:spcPts val="1620"/>
+              </a:lnSpc>
+              <a:spcAft>
+                <a:spcPts val="300"/>
+              </a:spcAft>
+              <a:buSzPct val="100000"/>
+              <a:buChar char="•"/>
+            </a:pPr>
+            <a:r>
+              <a:rPr lang="en-US" sz="1200" b="1" dirty="0">
+                <a:solidFill>
+                  <a:srgbClr val="1A1A1A"/>
+                </a:solidFill>
+                <a:latin typeface="Georgia" pitchFamily="34" charset="0"/>
+                <a:ea typeface="Georgia" pitchFamily="34" charset="-122"/>
+                <a:cs typeface="Georgia" pitchFamily="34" charset="-120"/>
+              </a:rPr>
+              <a:t>tanmātratvam</a:t>
+            </a:r>
+            <a:pPr algn="l" indent="0" marL="0">
+              <a:lnSpc>
+                <a:spcPts val="1620"/>
+              </a:lnSpc>
+              <a:spcAft>
+                <a:spcPts val="300"/>
+              </a:spcAft>
+              <a:buNone/>
+            </a:pPr>
+            <a:r>
+              <a:rPr lang="en-US" sz="1200" dirty="0">
+                <a:solidFill>
+                  <a:srgbClr val="1A1A1A"/>
+                </a:solidFill>
+                <a:latin typeface="Georgia" pitchFamily="34" charset="0"/>
+                <a:ea typeface="Georgia" pitchFamily="34" charset="-122"/>
+                <a:cs typeface="Georgia" pitchFamily="34" charset="-120"/>
+              </a:rPr>
+              <a:t> — the subtle-essence-ness</a:t>
+            </a:r>
+            <a:endParaRPr lang="en-US" sz="1200" dirty="0"/>
+          </a:p>
+          <a:p>
+            <a:pPr algn="l" marL="342900" indent="-342900">
+              <a:lnSpc>
+                <a:spcPts val="1620"/>
+              </a:lnSpc>
+              <a:spcAft>
+                <a:spcPts val="300"/>
+              </a:spcAft>
+              <a:buSzPct val="100000"/>
+              <a:buChar char="•"/>
+            </a:pPr>
+            <a:r>
+              <a:rPr lang="en-US" sz="1200" b="1" dirty="0">
+                <a:solidFill>
+                  <a:srgbClr val="1A1A1A"/>
+                </a:solidFill>
+                <a:latin typeface="Georgia" pitchFamily="34" charset="0"/>
+                <a:ea typeface="Georgia" pitchFamily="34" charset="-122"/>
+                <a:cs typeface="Georgia" pitchFamily="34" charset="-120"/>
+              </a:rPr>
+              <a:t>nabhasvataḥ</a:t>
+            </a:r>
+            <a:pPr algn="l" indent="0" marL="0">
+              <a:lnSpc>
+                <a:spcPts val="1620"/>
+              </a:lnSpc>
+              <a:spcAft>
+                <a:spcPts val="300"/>
+              </a:spcAft>
+              <a:buNone/>
+            </a:pPr>
+            <a:r>
+              <a:rPr lang="en-US" sz="1200" dirty="0">
+                <a:solidFill>
+                  <a:srgbClr val="1A1A1A"/>
+                </a:solidFill>
+                <a:latin typeface="Georgia" pitchFamily="34" charset="0"/>
+                <a:ea typeface="Georgia" pitchFamily="34" charset="-122"/>
+                <a:cs typeface="Georgia" pitchFamily="34" charset="-120"/>
+              </a:rPr>
+              <a:t> — of air / wind (genitive; nabhasvat = wind)</a:t>
+            </a:r>
+            <a:endParaRPr lang="en-US" sz="1200" dirty="0"/>
+          </a:p>
+        </p:txBody>
+      </p:sp>
+      <p:sp>
+        <p:nvSpPr>
+          <p:cNvPr id="9" name="Text 7"/>
+          <p:cNvSpPr/>
+          <p:nvPr/>
+        </p:nvSpPr>
+        <p:spPr>
+          <a:xfrm>
+            <a:off x="406301" y="5037832"/>
+            <a:ext cx="8498026" cy="213271"/>
+          </a:xfrm>
+          <a:prstGeom prst="rect">
+            <a:avLst/>
+          </a:prstGeom>
+          <a:noFill/>
+          <a:ln/>
+        </p:spPr>
+        <p:txBody>
+          <a:bodyPr wrap="square" lIns="0" tIns="0" rIns="0" bIns="0" rtlCol="0" anchor="t"/>
+          <a:lstStyle/>
+          <a:p>
+            <a:pPr algn="l" indent="0" marL="0">
+              <a:lnSpc>
+                <a:spcPts val="1680"/>
+              </a:lnSpc>
+              <a:spcBef>
+                <a:spcPts val="300"/>
+              </a:spcBef>
+              <a:spcAft>
+                <a:spcPts val="300"/>
+              </a:spcAft>
+              <a:buNone/>
+            </a:pPr>
+            <a:r>
+              <a:rPr lang="en-US" sz="1200" dirty="0">
+                <a:solidFill>
+                  <a:srgbClr val="1A1A1A"/>
+                </a:solidFill>
+                <a:latin typeface="Georgia" pitchFamily="34" charset="0"/>
+                <a:ea typeface="Georgia" pitchFamily="34" charset="-122"/>
+                <a:cs typeface="Georgia" pitchFamily="34" charset="-120"/>
+              </a:rPr>
+              <a:t>Continuous translation:    &gt; "Softness, hardness, cold and heat — these are the touch-ness of touch, the subtle essence of air."</a:t>
+            </a:r>
+            <a:endParaRPr lang="en-US" sz="1200" dirty="0"/>
+          </a:p>
+        </p:txBody>
+      </p:sp>
+      <p:sp>
+        <p:nvSpPr>
+          <p:cNvPr id="10" name="Text 8"/>
+          <p:cNvSpPr/>
+          <p:nvPr/>
+        </p:nvSpPr>
+        <p:spPr>
+          <a:xfrm>
+            <a:off x="634901" y="5339953"/>
             <a:ext cx="8102798" cy="281880"/>
           </a:xfrm>
           <a:prstGeom prst="rect">
@@ -3312,13 +3866,13 @@
       </p:sp>
       <p:sp>
         <p:nvSpPr>
-          <p:cNvPr id="9" name="Text 7"/>
+          <p:cNvPr id="11" name="Text 9"/>
           <p:cNvSpPr/>
           <p:nvPr/>
         </p:nvSpPr>
         <p:spPr>
           <a:xfrm>
-            <a:off x="406301" y="5872163"/>
+            <a:off x="406301" y="5710684"/>
             <a:ext cx="8498026" cy="639812"/>
           </a:xfrm>
           <a:prstGeom prst="rect">
@@ -3406,13 +3960,13 @@
       </p:sp>
       <p:sp>
         <p:nvSpPr>
-          <p:cNvPr id="10" name="Text 8"/>
+          <p:cNvPr id="12" name="Text 10"/>
           <p:cNvSpPr/>
           <p:nvPr/>
         </p:nvSpPr>
         <p:spPr>
           <a:xfrm>
-            <a:off x="406301" y="6664375"/>
+            <a:off x="406301" y="6502896"/>
             <a:ext cx="8498026" cy="213271"/>
           </a:xfrm>
           <a:prstGeom prst="rect">

--- a/exports/pptx/lessons/senior-module-02-panchabhuta/day-05-primary-source.pptx
+++ b/exports/pptx/lessons/senior-module-02-panchabhuta/day-05-primary-source.pptx
@@ -15,9 +15,13 @@
     <p:sldId id="263" r:id="rId9"/>
     <p:sldId id="264" r:id="rId10"/>
     <p:sldId id="265" r:id="rId11"/>
+    <p:sldId id="266" r:id="rId12"/>
+    <p:sldId id="267" r:id="rId13"/>
+    <p:sldId id="268" r:id="rId14"/>
+    <p:sldId id="269" r:id="rId15"/>
   </p:sldIdLst>
   <p:notesMasterIdLst>
-    <p:notesMasterId r:id="rId12"/>
+    <p:notesMasterId r:id="rId16"/>
   </p:notesMasterIdLst>
   <p:sldSz cx="9144000" cy="5143500"/>
   <p:notesSz cx="5143500" cy="9144000"/>
@@ -623,6 +627,358 @@
             <a:fld id="{F7021451-1387-4CA6-816F-3879F97B5CBC}" type="slidenum">
               <a:rPr lang="en-US"/>
               <a:t>10</a:t>
+            </a:fld>
+            <a:endParaRPr lang="en-US"/>
+          </a:p>
+        </p:txBody>
+      </p:sp>
+    </p:spTree>
+    <p:extLst>
+      <p:ext uri="{BB962C8B-B14F-4D97-AF65-F5344CB8AC3E}">
+        <p14:creationId xmlns:p14="http://schemas.microsoft.com/office/powerpoint/2010/main" val="1024086991"/>
+      </p:ext>
+    </p:extLst>
+  </p:cSld>
+  <p:clrMapOvr>
+    <a:masterClrMapping/>
+  </p:clrMapOvr>
+</p:notes>
+</file>
+
+<file path=ppt/notesSlides/notesSlide11.xml><?xml version="1.0" encoding="utf-8"?>
+<p:notes xmlns:a="http://schemas.openxmlformats.org/drawingml/2006/main" xmlns:r="http://schemas.openxmlformats.org/officeDocument/2006/relationships" xmlns:p="http://schemas.openxmlformats.org/presentationml/2006/main">
+  <p:cSld>
+    <p:spTree>
+      <p:nvGrpSpPr>
+        <p:cNvPr id="1" name=""/>
+        <p:cNvGrpSpPr/>
+        <p:nvPr/>
+      </p:nvGrpSpPr>
+      <p:grpSpPr>
+        <a:xfrm>
+          <a:off x="0" y="0"/>
+          <a:ext cx="0" cy="0"/>
+          <a:chOff x="0" y="0"/>
+          <a:chExt cx="0" cy="0"/>
+        </a:xfrm>
+      </p:grpSpPr>
+      <p:sp>
+        <p:nvSpPr>
+          <p:cNvPr id="2" name="Slide Image Placeholder 1"/>
+          <p:cNvSpPr>
+            <a:spLocks noGrp="1" noRot="1" noChangeAspect="1"/>
+          </p:cNvSpPr>
+          <p:nvPr>
+            <p:ph type="sldImg"/>
+          </p:nvPr>
+        </p:nvSpPr>
+        <p:spPr/>
+      </p:sp>
+      <p:sp>
+        <p:nvSpPr>
+          <p:cNvPr id="3" name="Notes Placeholder 2"/>
+          <p:cNvSpPr>
+            <a:spLocks noGrp="1"/>
+          </p:cNvSpPr>
+          <p:nvPr>
+            <p:ph type="body" idx="1"/>
+          </p:nvPr>
+        </p:nvSpPr>
+        <p:spPr/>
+        <p:txBody>
+          <a:bodyPr/>
+          <a:lstStyle/>
+          <a:p>
+            <a:r>
+              <a:rPr lang="en-US" dirty="0"/>
+              <a:t/>
+            </a:r>
+            <a:endParaRPr lang="en-US" dirty="0"/>
+          </a:p>
+        </p:txBody>
+      </p:sp>
+      <p:sp>
+        <p:nvSpPr>
+          <p:cNvPr id="4" name="Slide Number Placeholder 3"/>
+          <p:cNvSpPr>
+            <a:spLocks noGrp="1"/>
+          </p:cNvSpPr>
+          <p:nvPr>
+            <p:ph type="sldNum" sz="quarter" idx="10"/>
+          </p:nvPr>
+        </p:nvSpPr>
+        <p:spPr/>
+        <p:txBody>
+          <a:bodyPr/>
+          <a:lstStyle/>
+          <a:p>
+            <a:fld id="{F7021451-1387-4CA6-816F-3879F97B5CBC}" type="slidenum">
+              <a:rPr lang="en-US"/>
+              <a:t>11</a:t>
+            </a:fld>
+            <a:endParaRPr lang="en-US"/>
+          </a:p>
+        </p:txBody>
+      </p:sp>
+    </p:spTree>
+    <p:extLst>
+      <p:ext uri="{BB962C8B-B14F-4D97-AF65-F5344CB8AC3E}">
+        <p14:creationId xmlns:p14="http://schemas.microsoft.com/office/powerpoint/2010/main" val="1024086991"/>
+      </p:ext>
+    </p:extLst>
+  </p:cSld>
+  <p:clrMapOvr>
+    <a:masterClrMapping/>
+  </p:clrMapOvr>
+</p:notes>
+</file>
+
+<file path=ppt/notesSlides/notesSlide12.xml><?xml version="1.0" encoding="utf-8"?>
+<p:notes xmlns:a="http://schemas.openxmlformats.org/drawingml/2006/main" xmlns:r="http://schemas.openxmlformats.org/officeDocument/2006/relationships" xmlns:p="http://schemas.openxmlformats.org/presentationml/2006/main">
+  <p:cSld>
+    <p:spTree>
+      <p:nvGrpSpPr>
+        <p:cNvPr id="1" name=""/>
+        <p:cNvGrpSpPr/>
+        <p:nvPr/>
+      </p:nvGrpSpPr>
+      <p:grpSpPr>
+        <a:xfrm>
+          <a:off x="0" y="0"/>
+          <a:ext cx="0" cy="0"/>
+          <a:chOff x="0" y="0"/>
+          <a:chExt cx="0" cy="0"/>
+        </a:xfrm>
+      </p:grpSpPr>
+      <p:sp>
+        <p:nvSpPr>
+          <p:cNvPr id="2" name="Slide Image Placeholder 1"/>
+          <p:cNvSpPr>
+            <a:spLocks noGrp="1" noRot="1" noChangeAspect="1"/>
+          </p:cNvSpPr>
+          <p:nvPr>
+            <p:ph type="sldImg"/>
+          </p:nvPr>
+        </p:nvSpPr>
+        <p:spPr/>
+      </p:sp>
+      <p:sp>
+        <p:nvSpPr>
+          <p:cNvPr id="3" name="Notes Placeholder 2"/>
+          <p:cNvSpPr>
+            <a:spLocks noGrp="1"/>
+          </p:cNvSpPr>
+          <p:nvPr>
+            <p:ph type="body" idx="1"/>
+          </p:nvPr>
+        </p:nvSpPr>
+        <p:spPr/>
+        <p:txBody>
+          <a:bodyPr/>
+          <a:lstStyle/>
+          <a:p>
+            <a:r>
+              <a:rPr lang="en-US" dirty="0"/>
+              <a:t/>
+            </a:r>
+            <a:endParaRPr lang="en-US" dirty="0"/>
+          </a:p>
+        </p:txBody>
+      </p:sp>
+      <p:sp>
+        <p:nvSpPr>
+          <p:cNvPr id="4" name="Slide Number Placeholder 3"/>
+          <p:cNvSpPr>
+            <a:spLocks noGrp="1"/>
+          </p:cNvSpPr>
+          <p:nvPr>
+            <p:ph type="sldNum" sz="quarter" idx="10"/>
+          </p:nvPr>
+        </p:nvSpPr>
+        <p:spPr/>
+        <p:txBody>
+          <a:bodyPr/>
+          <a:lstStyle/>
+          <a:p>
+            <a:fld id="{F7021451-1387-4CA6-816F-3879F97B5CBC}" type="slidenum">
+              <a:rPr lang="en-US"/>
+              <a:t>12</a:t>
+            </a:fld>
+            <a:endParaRPr lang="en-US"/>
+          </a:p>
+        </p:txBody>
+      </p:sp>
+    </p:spTree>
+    <p:extLst>
+      <p:ext uri="{BB962C8B-B14F-4D97-AF65-F5344CB8AC3E}">
+        <p14:creationId xmlns:p14="http://schemas.microsoft.com/office/powerpoint/2010/main" val="1024086991"/>
+      </p:ext>
+    </p:extLst>
+  </p:cSld>
+  <p:clrMapOvr>
+    <a:masterClrMapping/>
+  </p:clrMapOvr>
+</p:notes>
+</file>
+
+<file path=ppt/notesSlides/notesSlide13.xml><?xml version="1.0" encoding="utf-8"?>
+<p:notes xmlns:a="http://schemas.openxmlformats.org/drawingml/2006/main" xmlns:r="http://schemas.openxmlformats.org/officeDocument/2006/relationships" xmlns:p="http://schemas.openxmlformats.org/presentationml/2006/main">
+  <p:cSld>
+    <p:spTree>
+      <p:nvGrpSpPr>
+        <p:cNvPr id="1" name=""/>
+        <p:cNvGrpSpPr/>
+        <p:nvPr/>
+      </p:nvGrpSpPr>
+      <p:grpSpPr>
+        <a:xfrm>
+          <a:off x="0" y="0"/>
+          <a:ext cx="0" cy="0"/>
+          <a:chOff x="0" y="0"/>
+          <a:chExt cx="0" cy="0"/>
+        </a:xfrm>
+      </p:grpSpPr>
+      <p:sp>
+        <p:nvSpPr>
+          <p:cNvPr id="2" name="Slide Image Placeholder 1"/>
+          <p:cNvSpPr>
+            <a:spLocks noGrp="1" noRot="1" noChangeAspect="1"/>
+          </p:cNvSpPr>
+          <p:nvPr>
+            <p:ph type="sldImg"/>
+          </p:nvPr>
+        </p:nvSpPr>
+        <p:spPr/>
+      </p:sp>
+      <p:sp>
+        <p:nvSpPr>
+          <p:cNvPr id="3" name="Notes Placeholder 2"/>
+          <p:cNvSpPr>
+            <a:spLocks noGrp="1"/>
+          </p:cNvSpPr>
+          <p:nvPr>
+            <p:ph type="body" idx="1"/>
+          </p:nvPr>
+        </p:nvSpPr>
+        <p:spPr/>
+        <p:txBody>
+          <a:bodyPr/>
+          <a:lstStyle/>
+          <a:p>
+            <a:r>
+              <a:rPr lang="en-US" dirty="0"/>
+              <a:t/>
+            </a:r>
+            <a:endParaRPr lang="en-US" dirty="0"/>
+          </a:p>
+        </p:txBody>
+      </p:sp>
+      <p:sp>
+        <p:nvSpPr>
+          <p:cNvPr id="4" name="Slide Number Placeholder 3"/>
+          <p:cNvSpPr>
+            <a:spLocks noGrp="1"/>
+          </p:cNvSpPr>
+          <p:nvPr>
+            <p:ph type="sldNum" sz="quarter" idx="10"/>
+          </p:nvPr>
+        </p:nvSpPr>
+        <p:spPr/>
+        <p:txBody>
+          <a:bodyPr/>
+          <a:lstStyle/>
+          <a:p>
+            <a:fld id="{F7021451-1387-4CA6-816F-3879F97B5CBC}" type="slidenum">
+              <a:rPr lang="en-US"/>
+              <a:t>13</a:t>
+            </a:fld>
+            <a:endParaRPr lang="en-US"/>
+          </a:p>
+        </p:txBody>
+      </p:sp>
+    </p:spTree>
+    <p:extLst>
+      <p:ext uri="{BB962C8B-B14F-4D97-AF65-F5344CB8AC3E}">
+        <p14:creationId xmlns:p14="http://schemas.microsoft.com/office/powerpoint/2010/main" val="1024086991"/>
+      </p:ext>
+    </p:extLst>
+  </p:cSld>
+  <p:clrMapOvr>
+    <a:masterClrMapping/>
+  </p:clrMapOvr>
+</p:notes>
+</file>
+
+<file path=ppt/notesSlides/notesSlide14.xml><?xml version="1.0" encoding="utf-8"?>
+<p:notes xmlns:a="http://schemas.openxmlformats.org/drawingml/2006/main" xmlns:r="http://schemas.openxmlformats.org/officeDocument/2006/relationships" xmlns:p="http://schemas.openxmlformats.org/presentationml/2006/main">
+  <p:cSld>
+    <p:spTree>
+      <p:nvGrpSpPr>
+        <p:cNvPr id="1" name=""/>
+        <p:cNvGrpSpPr/>
+        <p:nvPr/>
+      </p:nvGrpSpPr>
+      <p:grpSpPr>
+        <a:xfrm>
+          <a:off x="0" y="0"/>
+          <a:ext cx="0" cy="0"/>
+          <a:chOff x="0" y="0"/>
+          <a:chExt cx="0" cy="0"/>
+        </a:xfrm>
+      </p:grpSpPr>
+      <p:sp>
+        <p:nvSpPr>
+          <p:cNvPr id="2" name="Slide Image Placeholder 1"/>
+          <p:cNvSpPr>
+            <a:spLocks noGrp="1" noRot="1" noChangeAspect="1"/>
+          </p:cNvSpPr>
+          <p:nvPr>
+            <p:ph type="sldImg"/>
+          </p:nvPr>
+        </p:nvSpPr>
+        <p:spPr/>
+      </p:sp>
+      <p:sp>
+        <p:nvSpPr>
+          <p:cNvPr id="3" name="Notes Placeholder 2"/>
+          <p:cNvSpPr>
+            <a:spLocks noGrp="1"/>
+          </p:cNvSpPr>
+          <p:nvPr>
+            <p:ph type="body" idx="1"/>
+          </p:nvPr>
+        </p:nvSpPr>
+        <p:spPr/>
+        <p:txBody>
+          <a:bodyPr/>
+          <a:lstStyle/>
+          <a:p>
+            <a:r>
+              <a:rPr lang="en-US" dirty="0"/>
+              <a:t/>
+            </a:r>
+            <a:endParaRPr lang="en-US" dirty="0"/>
+          </a:p>
+        </p:txBody>
+      </p:sp>
+      <p:sp>
+        <p:nvSpPr>
+          <p:cNvPr id="4" name="Slide Number Placeholder 3"/>
+          <p:cNvSpPr>
+            <a:spLocks noGrp="1"/>
+          </p:cNvSpPr>
+          <p:nvPr>
+            <p:ph type="sldNum" sz="quarter" idx="10"/>
+          </p:nvPr>
+        </p:nvSpPr>
+        <p:spPr/>
+        <p:txBody>
+          <a:bodyPr/>
+          <a:lstStyle/>
+          <a:p>
+            <a:fld id="{F7021451-1387-4CA6-816F-3879F97B5CBC}" type="slidenum">
+              <a:rPr lang="en-US"/>
+              <a:t>14</a:t>
             </a:fld>
             <a:endParaRPr lang="en-US"/>
           </a:p>
@@ -1876,102 +2232,6 @@
         </p:nvSpPr>
         <p:spPr>
           <a:xfrm>
-            <a:off x="406301" y="1223963"/>
-            <a:ext cx="8498026" cy="274290"/>
-          </a:xfrm>
-          <a:prstGeom prst="rect">
-            <a:avLst/>
-          </a:prstGeom>
-          <a:noFill/>
-          <a:ln/>
-        </p:spPr>
-        <p:txBody>
-          <a:bodyPr wrap="square" lIns="0" tIns="0" rIns="0" bIns="0" rtlCol="0" anchor="t"/>
-          <a:lstStyle/>
-          <a:p>
-            <a:pPr algn="l" indent="0" marL="0">
-              <a:lnSpc>
-                <a:spcPts val="2160"/>
-              </a:lnSpc>
-              <a:spcBef>
-                <a:spcPts val="600"/>
-              </a:spcBef>
-              <a:spcAft>
-                <a:spcPts val="800"/>
-              </a:spcAft>
-              <a:buNone/>
-            </a:pPr>
-            <a:r>
-              <a:rPr lang="en-US" sz="1800" b="1" dirty="0">
-                <a:solidFill>
-                  <a:srgbClr val="997929"/>
-                </a:solidFill>
-                <a:latin typeface="Times New Roman" pitchFamily="34" charset="0"/>
-                <a:ea typeface="Times New Roman" pitchFamily="34" charset="-122"/>
-                <a:cs typeface="Times New Roman" pitchFamily="34" charset="-120"/>
-              </a:rPr>
-              <a:t>Learning objective</a:t>
-            </a:r>
-            <a:endParaRPr lang="en-US" sz="1800" dirty="0"/>
-          </a:p>
-        </p:txBody>
-      </p:sp>
-      <p:sp>
-        <p:nvSpPr>
-          <p:cNvPr id="6" name="Text 4"/>
-          <p:cNvSpPr/>
-          <p:nvPr/>
-        </p:nvSpPr>
-        <p:spPr>
-          <a:xfrm>
-            <a:off x="406301" y="1637854"/>
-            <a:ext cx="8498026" cy="213271"/>
-          </a:xfrm>
-          <a:prstGeom prst="rect">
-            <a:avLst/>
-          </a:prstGeom>
-          <a:noFill/>
-          <a:ln/>
-        </p:spPr>
-        <p:txBody>
-          <a:bodyPr wrap="square" lIns="0" tIns="0" rIns="0" bIns="0" rtlCol="0" anchor="t"/>
-          <a:lstStyle/>
-          <a:p>
-            <a:pPr algn="l" indent="0" marL="0">
-              <a:lnSpc>
-                <a:spcPts val="1680"/>
-              </a:lnSpc>
-              <a:spcBef>
-                <a:spcPts val="300"/>
-              </a:spcBef>
-              <a:spcAft>
-                <a:spcPts val="300"/>
-              </a:spcAft>
-              <a:buNone/>
-            </a:pPr>
-            <a:r>
-              <a:rPr lang="en-US" sz="1200" dirty="0">
-                <a:solidFill>
-                  <a:srgbClr val="1A1A1A"/>
-                </a:solidFill>
-                <a:latin typeface="Georgia" pitchFamily="34" charset="0"/>
-                <a:ea typeface="Georgia" pitchFamily="34" charset="-122"/>
-                <a:cs typeface="Georgia" pitchFamily="34" charset="-120"/>
-              </a:rPr>
-              <a:t>Students read SB 3.26.36 in IAST with word-by-word gloss and submit the formative quiz.</a:t>
-            </a:r>
-            <a:endParaRPr lang="en-US" sz="1200" dirty="0"/>
-          </a:p>
-        </p:txBody>
-      </p:sp>
-      <p:sp>
-        <p:nvSpPr>
-          <p:cNvPr id="7" name="Text 5"/>
-          <p:cNvSpPr/>
-          <p:nvPr/>
-        </p:nvSpPr>
-        <p:spPr>
-          <a:xfrm>
             <a:off x="406301" y="4434929"/>
             <a:ext cx="8498026" cy="213271"/>
           </a:xfrm>
@@ -2116,7 +2376,7 @@
                 <a:ea typeface="Times New Roman" pitchFamily="34" charset="-122"/>
                 <a:cs typeface="Times New Roman" pitchFamily="34" charset="-120"/>
               </a:rPr>
-              <a:t>Citation(s) used</a:t>
+              <a:t>Formative quiz (15 min)</a:t>
             </a:r>
             <a:endParaRPr lang="en-US" sz="1800" dirty="0"/>
           </a:p>
@@ -2130,8 +2390,8 @@
         </p:nvSpPr>
         <p:spPr>
           <a:xfrm>
-            <a:off x="406301" y="870942"/>
-            <a:ext cx="8498026" cy="222796"/>
+            <a:off x="634901" y="883593"/>
+            <a:ext cx="8102798" cy="300930"/>
           </a:xfrm>
           <a:prstGeom prst="rect">
             <a:avLst/>
@@ -2143,8 +2403,74 @@
           <a:bodyPr wrap="square" lIns="0" tIns="0" rIns="0" bIns="0" rtlCol="0" anchor="t"/>
           <a:lstStyle/>
           <a:p>
+            <a:pPr algn="l" marL="342900" indent="-342900">
+              <a:lnSpc>
+                <a:spcPts val="1620"/>
+              </a:lnSpc>
+              <a:spcAft>
+                <a:spcPts val="300"/>
+              </a:spcAft>
+              <a:buSzPct val="100000"/>
+              <a:buChar char="•"/>
+            </a:pPr>
+            <a:r>
+              <a:rPr lang="en-US" sz="1200" dirty="0">
+                <a:solidFill>
+                  <a:srgbClr val="1A1A1A"/>
+                </a:solidFill>
+                <a:latin typeface="Georgia" pitchFamily="34" charset="0"/>
+                <a:ea typeface="Georgia" pitchFamily="34" charset="-122"/>
+                <a:cs typeface="Georgia" pitchFamily="34" charset="-120"/>
+              </a:rPr>
+              <a:t>quizzes/formative.md</a:t>
+            </a:r>
             <a:pPr algn="l" indent="0" marL="0">
               <a:lnSpc>
+                <a:spcPts val="1620"/>
+              </a:lnSpc>
+              <a:spcAft>
+                <a:spcPts val="300"/>
+              </a:spcAft>
+              <a:buNone/>
+            </a:pPr>
+            <a:r>
+              <a:rPr lang="en-US" sz="1200" dirty="0">
+                <a:solidFill>
+                  <a:srgbClr val="1A1A1A"/>
+                </a:solidFill>
+                <a:latin typeface="Georgia" pitchFamily="34" charset="0"/>
+                <a:ea typeface="Georgia" pitchFamily="34" charset="-122"/>
+                <a:cs typeface="Georgia" pitchFamily="34" charset="-120"/>
+              </a:rPr>
+              <a:t> Part B.</a:t>
+            </a:r>
+            <a:endParaRPr lang="en-US" sz="1200" dirty="0"/>
+          </a:p>
+        </p:txBody>
+      </p:sp>
+      <p:sp>
+        <p:nvSpPr>
+          <p:cNvPr id="5" name="Text 3"/>
+          <p:cNvSpPr/>
+          <p:nvPr/>
+        </p:nvSpPr>
+        <p:spPr>
+          <a:xfrm>
+            <a:off x="406301" y="4434929"/>
+            <a:ext cx="8498026" cy="213271"/>
+          </a:xfrm>
+          <a:prstGeom prst="rect">
+            <a:avLst/>
+          </a:prstGeom>
+          <a:noFill/>
+          <a:ln/>
+        </p:spPr>
+        <p:txBody>
+          <a:bodyPr wrap="square" lIns="0" tIns="0" rIns="0" bIns="0" rtlCol="0" anchor="t"/>
+          <a:lstStyle/>
+          <a:p>
+            <a:pPr algn="l" indent="0" marL="0">
+              <a:lnSpc>
                 <a:spcPts val="1680"/>
               </a:lnSpc>
               <a:spcBef>
@@ -2164,15 +2490,968 @@
                 <a:ea typeface="Georgia" pitchFamily="34" charset="-122"/>
                 <a:cs typeface="Georgia" pitchFamily="34" charset="-120"/>
               </a:rPr>
-              <a:t>– SB 3.26.36 — vidya-karana RAG cache </a:t>
-            </a:r>
+              <a:t>Senior ·  · IKS Curriculum</a:t>
+            </a:r>
+            <a:endParaRPr lang="en-US" sz="1200" dirty="0"/>
+          </a:p>
+        </p:txBody>
+      </p:sp>
+    </p:spTree>
+  </p:cSld>
+  <p:clrMapOvr>
+    <a:masterClrMapping/>
+  </p:clrMapOvr>
+</p:sld>
+</file>
+
+<file path=ppt/slides/slide11.xml><?xml version="1.0" encoding="utf-8"?>
+<p:sld xmlns:a="http://schemas.openxmlformats.org/drawingml/2006/main" xmlns:r="http://schemas.openxmlformats.org/officeDocument/2006/relationships" xmlns:p="http://schemas.openxmlformats.org/presentationml/2006/main">
+  <p:cSld name="Slide 11">
+    <p:bg>
+      <p:bgPr>
+        <a:solidFill>
+          <a:srgbClr val="FAF7F2"/>
+        </a:solidFill>
+      </p:bgPr>
+    </p:bg>
+    <p:spTree>
+      <p:nvGrpSpPr>
+        <p:cNvPr id="1" name=""/>
+        <p:cNvGrpSpPr/>
+        <p:nvPr/>
+      </p:nvGrpSpPr>
+      <p:grpSpPr>
+        <a:xfrm>
+          <a:off x="0" y="0"/>
+          <a:ext cx="0" cy="0"/>
+          <a:chOff x="0" y="0"/>
+          <a:chExt cx="0" cy="0"/>
+        </a:xfrm>
+      </p:grpSpPr>
+      <p:sp>
+        <p:nvSpPr>
+          <p:cNvPr id="2" name="Text 0"/>
+          <p:cNvSpPr/>
+          <p:nvPr/>
+        </p:nvSpPr>
+        <p:spPr>
+          <a:xfrm>
+            <a:off x="0" y="0"/>
+            <a:ext cx="9144000" cy="101501"/>
+          </a:xfrm>
+          <a:prstGeom prst="rect">
+            <a:avLst/>
+          </a:prstGeom>
+          <a:solidFill>
+            <a:srgbClr val="5D1D2E"/>
+          </a:solidFill>
+          <a:ln/>
+        </p:spPr>
+        <p:txBody>
+          <a:bodyPr wrap="square" rtlCol="0" anchor="ctr"/>
+          <a:lstStyle/>
+          <a:p>
+            <a:pPr indent="0" marL="0">
+              <a:buNone/>
+            </a:pPr>
+            <a:endParaRPr lang="en-US" dirty="0"/>
+          </a:p>
+        </p:txBody>
+      </p:sp>
+      <p:sp>
+        <p:nvSpPr>
+          <p:cNvPr id="3" name="Text 1"/>
+          <p:cNvSpPr/>
+          <p:nvPr/>
+        </p:nvSpPr>
+        <p:spPr>
+          <a:xfrm>
+            <a:off x="406301" y="457051"/>
+            <a:ext cx="8498026" cy="274290"/>
+          </a:xfrm>
+          <a:prstGeom prst="rect">
+            <a:avLst/>
+          </a:prstGeom>
+          <a:noFill/>
+          <a:ln/>
+        </p:spPr>
+        <p:txBody>
+          <a:bodyPr wrap="square" lIns="0" tIns="0" rIns="0" bIns="0" rtlCol="0" anchor="t"/>
+          <a:lstStyle/>
+          <a:p>
             <a:pPr algn="l" indent="0" marL="0">
               <a:lnSpc>
+                <a:spcPts val="2160"/>
+              </a:lnSpc>
+              <a:spcBef>
+                <a:spcPts val="600"/>
+              </a:spcBef>
+              <a:spcAft>
+                <a:spcPts val="800"/>
+              </a:spcAft>
+              <a:buNone/>
+            </a:pPr>
+            <a:r>
+              <a:rPr lang="en-US" sz="1800" b="1" dirty="0">
+                <a:solidFill>
+                  <a:srgbClr val="997929"/>
+                </a:solidFill>
+                <a:latin typeface="Times New Roman" pitchFamily="34" charset="0"/>
+                <a:ea typeface="Times New Roman" pitchFamily="34" charset="-122"/>
+                <a:cs typeface="Times New Roman" pitchFamily="34" charset="-120"/>
+              </a:rPr>
+              <a:t>Wrap-up (5 min)</a:t>
+            </a:r>
+            <a:endParaRPr lang="en-US" sz="1800" dirty="0"/>
+          </a:p>
+        </p:txBody>
+      </p:sp>
+      <p:sp>
+        <p:nvSpPr>
+          <p:cNvPr id="4" name="Text 2"/>
+          <p:cNvSpPr/>
+          <p:nvPr/>
+        </p:nvSpPr>
+        <p:spPr>
+          <a:xfrm>
+            <a:off x="634901" y="883593"/>
+            <a:ext cx="8102798" cy="281880"/>
+          </a:xfrm>
+          <a:prstGeom prst="rect">
+            <a:avLst/>
+          </a:prstGeom>
+          <a:noFill/>
+          <a:ln/>
+        </p:spPr>
+        <p:txBody>
+          <a:bodyPr wrap="square" lIns="0" tIns="0" rIns="0" bIns="0" rtlCol="0" anchor="t"/>
+          <a:lstStyle/>
+          <a:p>
+            <a:pPr algn="l" marL="342900" indent="-342900">
+              <a:lnSpc>
+                <a:spcPts val="1620"/>
+              </a:lnSpc>
+              <a:spcAft>
+                <a:spcPts val="300"/>
+              </a:spcAft>
+              <a:buSzPct val="100000"/>
+              <a:buChar char="•"/>
+            </a:pPr>
+            <a:r>
+              <a:rPr lang="en-US" sz="1200" dirty="0">
+                <a:solidFill>
+                  <a:srgbClr val="1A1A1A"/>
+                </a:solidFill>
+                <a:latin typeface="Georgia" pitchFamily="34" charset="0"/>
+                <a:ea typeface="Georgia" pitchFamily="34" charset="-122"/>
+                <a:cs typeface="Georgia" pitchFamily="34" charset="-120"/>
+              </a:rPr>
+              <a:t>Preview Day 6: </a:t>
+            </a:r>
+            <a:pPr algn="l" indent="0" marL="0">
+              <a:lnSpc>
+                <a:spcPts val="1620"/>
+              </a:lnSpc>
+              <a:spcAft>
+                <a:spcPts val="300"/>
+              </a:spcAft>
+              <a:buNone/>
+            </a:pPr>
+            <a:r>
+              <a:rPr lang="en-US" sz="1200" i="1" dirty="0">
+                <a:solidFill>
+                  <a:srgbClr val="1A1A1A"/>
+                </a:solidFill>
+                <a:latin typeface="Georgia" pitchFamily="34" charset="0"/>
+                <a:ea typeface="Georgia" pitchFamily="34" charset="-122"/>
+                <a:cs typeface="Georgia" pitchFamily="34" charset="-120"/>
+              </a:rPr>
+              <a:t>"Tomorrow — the modern lens. What modern science adds, and what it explicitly drops."</a:t>
+            </a:r>
+            <a:endParaRPr lang="en-US" sz="1200" dirty="0"/>
+          </a:p>
+        </p:txBody>
+      </p:sp>
+      <p:sp>
+        <p:nvSpPr>
+          <p:cNvPr id="5" name="Text 3"/>
+          <p:cNvSpPr/>
+          <p:nvPr/>
+        </p:nvSpPr>
+        <p:spPr>
+          <a:xfrm>
+            <a:off x="406301" y="4434929"/>
+            <a:ext cx="8498026" cy="213271"/>
+          </a:xfrm>
+          <a:prstGeom prst="rect">
+            <a:avLst/>
+          </a:prstGeom>
+          <a:noFill/>
+          <a:ln/>
+        </p:spPr>
+        <p:txBody>
+          <a:bodyPr wrap="square" lIns="0" tIns="0" rIns="0" bIns="0" rtlCol="0" anchor="t"/>
+          <a:lstStyle/>
+          <a:p>
+            <a:pPr algn="l" indent="0" marL="0">
+              <a:lnSpc>
                 <a:spcPts val="1680"/>
               </a:lnSpc>
               <a:spcBef>
                 <a:spcPts val="300"/>
               </a:spcBef>
+              <a:spcAft>
+                <a:spcPts val="300"/>
+              </a:spcAft>
+              <a:buNone/>
+            </a:pPr>
+            <a:r>
+              <a:rPr lang="en-US" sz="1200" dirty="0">
+                <a:solidFill>
+                  <a:srgbClr val="1A1A1A"/>
+                </a:solidFill>
+                <a:latin typeface="Georgia" pitchFamily="34" charset="0"/>
+                <a:ea typeface="Georgia" pitchFamily="34" charset="-122"/>
+                <a:cs typeface="Georgia" pitchFamily="34" charset="-120"/>
+              </a:rPr>
+              <a:t>Senior ·  · IKS Curriculum</a:t>
+            </a:r>
+            <a:endParaRPr lang="en-US" sz="1200" dirty="0"/>
+          </a:p>
+        </p:txBody>
+      </p:sp>
+    </p:spTree>
+  </p:cSld>
+  <p:clrMapOvr>
+    <a:masterClrMapping/>
+  </p:clrMapOvr>
+</p:sld>
+</file>
+
+<file path=ppt/slides/slide12.xml><?xml version="1.0" encoding="utf-8"?>
+<p:sld xmlns:a="http://schemas.openxmlformats.org/drawingml/2006/main" xmlns:r="http://schemas.openxmlformats.org/officeDocument/2006/relationships" xmlns:p="http://schemas.openxmlformats.org/presentationml/2006/main">
+  <p:cSld name="Slide 12">
+    <p:bg>
+      <p:bgPr>
+        <a:solidFill>
+          <a:srgbClr val="FAF7F2"/>
+        </a:solidFill>
+      </p:bgPr>
+    </p:bg>
+    <p:spTree>
+      <p:nvGrpSpPr>
+        <p:cNvPr id="1" name=""/>
+        <p:cNvGrpSpPr/>
+        <p:nvPr/>
+      </p:nvGrpSpPr>
+      <p:grpSpPr>
+        <a:xfrm>
+          <a:off x="0" y="0"/>
+          <a:ext cx="0" cy="0"/>
+          <a:chOff x="0" y="0"/>
+          <a:chExt cx="0" cy="0"/>
+        </a:xfrm>
+      </p:grpSpPr>
+      <p:sp>
+        <p:nvSpPr>
+          <p:cNvPr id="2" name="Text 0"/>
+          <p:cNvSpPr/>
+          <p:nvPr/>
+        </p:nvSpPr>
+        <p:spPr>
+          <a:xfrm>
+            <a:off x="0" y="0"/>
+            <a:ext cx="9144000" cy="101501"/>
+          </a:xfrm>
+          <a:prstGeom prst="rect">
+            <a:avLst/>
+          </a:prstGeom>
+          <a:solidFill>
+            <a:srgbClr val="5D1D2E"/>
+          </a:solidFill>
+          <a:ln/>
+        </p:spPr>
+        <p:txBody>
+          <a:bodyPr wrap="square" rtlCol="0" anchor="ctr"/>
+          <a:lstStyle/>
+          <a:p>
+            <a:pPr indent="0" marL="0">
+              <a:buNone/>
+            </a:pPr>
+            <a:endParaRPr lang="en-US" dirty="0"/>
+          </a:p>
+        </p:txBody>
+      </p:sp>
+      <p:sp>
+        <p:nvSpPr>
+          <p:cNvPr id="3" name="Text 1"/>
+          <p:cNvSpPr/>
+          <p:nvPr/>
+        </p:nvSpPr>
+        <p:spPr>
+          <a:xfrm>
+            <a:off x="406301" y="457051"/>
+            <a:ext cx="8498026" cy="274290"/>
+          </a:xfrm>
+          <a:prstGeom prst="rect">
+            <a:avLst/>
+          </a:prstGeom>
+          <a:noFill/>
+          <a:ln/>
+        </p:spPr>
+        <p:txBody>
+          <a:bodyPr wrap="square" lIns="0" tIns="0" rIns="0" bIns="0" rtlCol="0" anchor="t"/>
+          <a:lstStyle/>
+          <a:p>
+            <a:pPr algn="l" indent="0" marL="0">
+              <a:lnSpc>
+                <a:spcPts val="2160"/>
+              </a:lnSpc>
+              <a:spcBef>
+                <a:spcPts val="600"/>
+              </a:spcBef>
+              <a:spcAft>
+                <a:spcPts val="800"/>
+              </a:spcAft>
+              <a:buNone/>
+            </a:pPr>
+            <a:r>
+              <a:rPr lang="en-US" sz="1800" b="1" dirty="0">
+                <a:solidFill>
+                  <a:srgbClr val="997929"/>
+                </a:solidFill>
+                <a:latin typeface="Times New Roman" pitchFamily="34" charset="0"/>
+                <a:ea typeface="Times New Roman" pitchFamily="34" charset="-122"/>
+                <a:cs typeface="Times New Roman" pitchFamily="34" charset="-120"/>
+              </a:rPr>
+              <a:t>Differentiation</a:t>
+            </a:r>
+            <a:endParaRPr lang="en-US" sz="1800" dirty="0"/>
+          </a:p>
+        </p:txBody>
+      </p:sp>
+      <p:sp>
+        <p:nvSpPr>
+          <p:cNvPr id="4" name="Text 2"/>
+          <p:cNvSpPr/>
+          <p:nvPr/>
+        </p:nvSpPr>
+        <p:spPr>
+          <a:xfrm>
+            <a:off x="634901" y="883593"/>
+            <a:ext cx="8102798" cy="525661"/>
+          </a:xfrm>
+          <a:prstGeom prst="rect">
+            <a:avLst/>
+          </a:prstGeom>
+          <a:noFill/>
+          <a:ln/>
+        </p:spPr>
+        <p:txBody>
+          <a:bodyPr wrap="square" lIns="0" tIns="0" rIns="0" bIns="0" rtlCol="0" anchor="t"/>
+          <a:lstStyle/>
+          <a:p>
+            <a:pPr algn="l" marL="342900" indent="-342900">
+              <a:lnSpc>
+                <a:spcPts val="1620"/>
+              </a:lnSpc>
+              <a:spcAft>
+                <a:spcPts val="300"/>
+              </a:spcAft>
+              <a:buSzPct val="100000"/>
+              <a:buChar char="•"/>
+            </a:pPr>
+            <a:r>
+              <a:rPr lang="en-US" sz="1200" b="1" dirty="0">
+                <a:solidFill>
+                  <a:srgbClr val="1A1A1A"/>
+                </a:solidFill>
+                <a:latin typeface="Georgia" pitchFamily="34" charset="0"/>
+                <a:ea typeface="Georgia" pitchFamily="34" charset="-122"/>
+                <a:cs typeface="Georgia" pitchFamily="34" charset="-120"/>
+              </a:rPr>
+              <a:t>Tier up:</a:t>
+            </a:r>
+            <a:pPr algn="l" indent="0" marL="0">
+              <a:lnSpc>
+                <a:spcPts val="1620"/>
+              </a:lnSpc>
+              <a:spcAft>
+                <a:spcPts val="300"/>
+              </a:spcAft>
+              <a:buNone/>
+            </a:pPr>
+            <a:r>
+              <a:rPr lang="en-US" sz="1200" dirty="0">
+                <a:solidFill>
+                  <a:srgbClr val="1A1A1A"/>
+                </a:solidFill>
+                <a:latin typeface="Georgia" pitchFamily="34" charset="0"/>
+                <a:ea typeface="Georgia" pitchFamily="34" charset="-122"/>
+                <a:cs typeface="Georgia" pitchFamily="34" charset="-120"/>
+              </a:rPr>
+              <a:t> Write a 1-paragraph response to "what is gained when philosophy gives an </a:t>
+            </a:r>
+            <a:pPr algn="l" indent="0" marL="0">
+              <a:lnSpc>
+                <a:spcPts val="1620"/>
+              </a:lnSpc>
+              <a:spcAft>
+                <a:spcPts val="300"/>
+              </a:spcAft>
+              <a:buNone/>
+            </a:pPr>
+            <a:r>
+              <a:rPr lang="en-US" sz="1200" i="1" dirty="0">
+                <a:solidFill>
+                  <a:srgbClr val="1A1A1A"/>
+                </a:solidFill>
+                <a:latin typeface="Georgia" pitchFamily="34" charset="0"/>
+                <a:ea typeface="Georgia" pitchFamily="34" charset="-122"/>
+                <a:cs typeface="Georgia" pitchFamily="34" charset="-120"/>
+              </a:rPr>
+              <a:t>essence</a:t>
+            </a:r>
+            <a:pPr algn="l" indent="0" marL="0">
+              <a:lnSpc>
+                <a:spcPts val="1620"/>
+              </a:lnSpc>
+              <a:spcAft>
+                <a:spcPts val="300"/>
+              </a:spcAft>
+              <a:buNone/>
+            </a:pPr>
+            <a:r>
+              <a:rPr lang="en-US" sz="1200" dirty="0">
+                <a:solidFill>
+                  <a:srgbClr val="1A1A1A"/>
+                </a:solidFill>
+                <a:latin typeface="Georgia" pitchFamily="34" charset="0"/>
+                <a:ea typeface="Georgia" pitchFamily="34" charset="-122"/>
+                <a:cs typeface="Georgia" pitchFamily="34" charset="-120"/>
+              </a:rPr>
+              <a:t> a name?"</a:t>
+            </a:r>
+            <a:endParaRPr lang="en-US" sz="1200" dirty="0"/>
+          </a:p>
+          <a:p>
+            <a:pPr algn="l" marL="342900" indent="-342900">
+              <a:lnSpc>
+                <a:spcPts val="1620"/>
+              </a:lnSpc>
+              <a:spcAft>
+                <a:spcPts val="300"/>
+              </a:spcAft>
+              <a:buSzPct val="100000"/>
+              <a:buChar char="•"/>
+            </a:pPr>
+            <a:r>
+              <a:rPr lang="en-US" sz="1200" b="1" dirty="0">
+                <a:solidFill>
+                  <a:srgbClr val="1A1A1A"/>
+                </a:solidFill>
+                <a:latin typeface="Georgia" pitchFamily="34" charset="0"/>
+                <a:ea typeface="Georgia" pitchFamily="34" charset="-122"/>
+                <a:cs typeface="Georgia" pitchFamily="34" charset="-120"/>
+              </a:rPr>
+              <a:t>Tier down:</a:t>
+            </a:r>
+            <a:pPr algn="l" indent="0" marL="0">
+              <a:lnSpc>
+                <a:spcPts val="1620"/>
+              </a:lnSpc>
+              <a:spcAft>
+                <a:spcPts val="300"/>
+              </a:spcAft>
+              <a:buNone/>
+            </a:pPr>
+            <a:r>
+              <a:rPr lang="en-US" sz="1200" dirty="0">
+                <a:solidFill>
+                  <a:srgbClr val="1A1A1A"/>
+                </a:solidFill>
+                <a:latin typeface="Georgia" pitchFamily="34" charset="0"/>
+                <a:ea typeface="Georgia" pitchFamily="34" charset="-122"/>
+                <a:cs typeface="Georgia" pitchFamily="34" charset="-120"/>
+              </a:rPr>
+              <a:t> Focus on the meaning. The IAST pronunciation is bonus.</a:t>
+            </a:r>
+            <a:endParaRPr lang="en-US" sz="1200" dirty="0"/>
+          </a:p>
+        </p:txBody>
+      </p:sp>
+      <p:sp>
+        <p:nvSpPr>
+          <p:cNvPr id="5" name="Text 3"/>
+          <p:cNvSpPr/>
+          <p:nvPr/>
+        </p:nvSpPr>
+        <p:spPr>
+          <a:xfrm>
+            <a:off x="406301" y="4434929"/>
+            <a:ext cx="8498026" cy="213271"/>
+          </a:xfrm>
+          <a:prstGeom prst="rect">
+            <a:avLst/>
+          </a:prstGeom>
+          <a:noFill/>
+          <a:ln/>
+        </p:spPr>
+        <p:txBody>
+          <a:bodyPr wrap="square" lIns="0" tIns="0" rIns="0" bIns="0" rtlCol="0" anchor="t"/>
+          <a:lstStyle/>
+          <a:p>
+            <a:pPr algn="l" indent="0" marL="0">
+              <a:lnSpc>
+                <a:spcPts val="1680"/>
+              </a:lnSpc>
+              <a:spcBef>
+                <a:spcPts val="300"/>
+              </a:spcBef>
+              <a:spcAft>
+                <a:spcPts val="300"/>
+              </a:spcAft>
+              <a:buNone/>
+            </a:pPr>
+            <a:r>
+              <a:rPr lang="en-US" sz="1200" dirty="0">
+                <a:solidFill>
+                  <a:srgbClr val="1A1A1A"/>
+                </a:solidFill>
+                <a:latin typeface="Georgia" pitchFamily="34" charset="0"/>
+                <a:ea typeface="Georgia" pitchFamily="34" charset="-122"/>
+                <a:cs typeface="Georgia" pitchFamily="34" charset="-120"/>
+              </a:rPr>
+              <a:t>Senior ·  · IKS Curriculum</a:t>
+            </a:r>
+            <a:endParaRPr lang="en-US" sz="1200" dirty="0"/>
+          </a:p>
+        </p:txBody>
+      </p:sp>
+    </p:spTree>
+  </p:cSld>
+  <p:clrMapOvr>
+    <a:masterClrMapping/>
+  </p:clrMapOvr>
+</p:sld>
+</file>
+
+<file path=ppt/slides/slide13.xml><?xml version="1.0" encoding="utf-8"?>
+<p:sld xmlns:a="http://schemas.openxmlformats.org/drawingml/2006/main" xmlns:r="http://schemas.openxmlformats.org/officeDocument/2006/relationships" xmlns:p="http://schemas.openxmlformats.org/presentationml/2006/main">
+  <p:cSld name="Slide 13">
+    <p:bg>
+      <p:bgPr>
+        <a:solidFill>
+          <a:srgbClr val="FAF7F2"/>
+        </a:solidFill>
+      </p:bgPr>
+    </p:bg>
+    <p:spTree>
+      <p:nvGrpSpPr>
+        <p:cNvPr id="1" name=""/>
+        <p:cNvGrpSpPr/>
+        <p:nvPr/>
+      </p:nvGrpSpPr>
+      <p:grpSpPr>
+        <a:xfrm>
+          <a:off x="0" y="0"/>
+          <a:ext cx="0" cy="0"/>
+          <a:chOff x="0" y="0"/>
+          <a:chExt cx="0" cy="0"/>
+        </a:xfrm>
+      </p:grpSpPr>
+      <p:sp>
+        <p:nvSpPr>
+          <p:cNvPr id="2" name="Text 0"/>
+          <p:cNvSpPr/>
+          <p:nvPr/>
+        </p:nvSpPr>
+        <p:spPr>
+          <a:xfrm>
+            <a:off x="0" y="0"/>
+            <a:ext cx="9144000" cy="101501"/>
+          </a:xfrm>
+          <a:prstGeom prst="rect">
+            <a:avLst/>
+          </a:prstGeom>
+          <a:solidFill>
+            <a:srgbClr val="5D1D2E"/>
+          </a:solidFill>
+          <a:ln/>
+        </p:spPr>
+        <p:txBody>
+          <a:bodyPr wrap="square" rtlCol="0" anchor="ctr"/>
+          <a:lstStyle/>
+          <a:p>
+            <a:pPr indent="0" marL="0">
+              <a:buNone/>
+            </a:pPr>
+            <a:endParaRPr lang="en-US" dirty="0"/>
+          </a:p>
+        </p:txBody>
+      </p:sp>
+      <p:sp>
+        <p:nvSpPr>
+          <p:cNvPr id="3" name="Text 1"/>
+          <p:cNvSpPr/>
+          <p:nvPr/>
+        </p:nvSpPr>
+        <p:spPr>
+          <a:xfrm>
+            <a:off x="406301" y="457051"/>
+            <a:ext cx="8498026" cy="274290"/>
+          </a:xfrm>
+          <a:prstGeom prst="rect">
+            <a:avLst/>
+          </a:prstGeom>
+          <a:noFill/>
+          <a:ln/>
+        </p:spPr>
+        <p:txBody>
+          <a:bodyPr wrap="square" lIns="0" tIns="0" rIns="0" bIns="0" rtlCol="0" anchor="t"/>
+          <a:lstStyle/>
+          <a:p>
+            <a:pPr algn="l" indent="0" marL="0">
+              <a:lnSpc>
+                <a:spcPts val="2160"/>
+              </a:lnSpc>
+              <a:spcBef>
+                <a:spcPts val="600"/>
+              </a:spcBef>
+              <a:spcAft>
+                <a:spcPts val="800"/>
+              </a:spcAft>
+              <a:buNone/>
+            </a:pPr>
+            <a:r>
+              <a:rPr lang="en-US" sz="1800" b="1" dirty="0">
+                <a:solidFill>
+                  <a:srgbClr val="997929"/>
+                </a:solidFill>
+                <a:latin typeface="Times New Roman" pitchFamily="34" charset="0"/>
+                <a:ea typeface="Times New Roman" pitchFamily="34" charset="-122"/>
+                <a:cs typeface="Times New Roman" pitchFamily="34" charset="-120"/>
+              </a:rPr>
+              <a:t>Teacher notes</a:t>
+            </a:r>
+            <a:endParaRPr lang="en-US" sz="1800" dirty="0"/>
+          </a:p>
+        </p:txBody>
+      </p:sp>
+      <p:sp>
+        <p:nvSpPr>
+          <p:cNvPr id="4" name="Text 2"/>
+          <p:cNvSpPr/>
+          <p:nvPr/>
+        </p:nvSpPr>
+        <p:spPr>
+          <a:xfrm>
+            <a:off x="634901" y="883593"/>
+            <a:ext cx="8102798" cy="525661"/>
+          </a:xfrm>
+          <a:prstGeom prst="rect">
+            <a:avLst/>
+          </a:prstGeom>
+          <a:noFill/>
+          <a:ln/>
+        </p:spPr>
+        <p:txBody>
+          <a:bodyPr wrap="square" lIns="0" tIns="0" rIns="0" bIns="0" rtlCol="0" anchor="t"/>
+          <a:lstStyle/>
+          <a:p>
+            <a:pPr algn="l" marL="342900" indent="-342900">
+              <a:lnSpc>
+                <a:spcPts val="1620"/>
+              </a:lnSpc>
+              <a:spcAft>
+                <a:spcPts val="300"/>
+              </a:spcAft>
+              <a:buSzPct val="100000"/>
+              <a:buChar char="•"/>
+            </a:pPr>
+            <a:r>
+              <a:rPr lang="en-US" sz="1200" dirty="0">
+                <a:solidFill>
+                  <a:srgbClr val="1A1A1A"/>
+                </a:solidFill>
+                <a:latin typeface="Georgia" pitchFamily="34" charset="0"/>
+                <a:ea typeface="Georgia" pitchFamily="34" charset="-122"/>
+                <a:cs typeface="Georgia" pitchFamily="34" charset="-120"/>
+              </a:rPr>
+              <a:t>Don't require pronunciation perfection. The win is </a:t>
+            </a:r>
+            <a:pPr algn="l" indent="0" marL="0">
+              <a:lnSpc>
+                <a:spcPts val="1620"/>
+              </a:lnSpc>
+              <a:spcAft>
+                <a:spcPts val="300"/>
+              </a:spcAft>
+              <a:buNone/>
+            </a:pPr>
+            <a:r>
+              <a:rPr lang="en-US" sz="1200" i="1" dirty="0">
+                <a:solidFill>
+                  <a:srgbClr val="1A1A1A"/>
+                </a:solidFill>
+                <a:latin typeface="Georgia" pitchFamily="34" charset="0"/>
+                <a:ea typeface="Georgia" pitchFamily="34" charset="-122"/>
+                <a:cs typeface="Georgia" pitchFamily="34" charset="-120"/>
+              </a:rPr>
+              <a:t>engagement with the meaning at primary-source level</a:t>
+            </a:r>
+            <a:pPr algn="l" indent="0" marL="0">
+              <a:lnSpc>
+                <a:spcPts val="1620"/>
+              </a:lnSpc>
+              <a:spcAft>
+                <a:spcPts val="300"/>
+              </a:spcAft>
+              <a:buNone/>
+            </a:pPr>
+            <a:r>
+              <a:rPr lang="en-US" sz="1200" dirty="0">
+                <a:solidFill>
+                  <a:srgbClr val="1A1A1A"/>
+                </a:solidFill>
+                <a:latin typeface="Georgia" pitchFamily="34" charset="0"/>
+                <a:ea typeface="Georgia" pitchFamily="34" charset="-122"/>
+                <a:cs typeface="Georgia" pitchFamily="34" charset="-120"/>
+              </a:rPr>
+              <a:t>.</a:t>
+            </a:r>
+            <a:endParaRPr lang="en-US" sz="1200" dirty="0"/>
+          </a:p>
+          <a:p>
+            <a:pPr algn="l" marL="342900" indent="-342900">
+              <a:lnSpc>
+                <a:spcPts val="1620"/>
+              </a:lnSpc>
+              <a:spcAft>
+                <a:spcPts val="300"/>
+              </a:spcAft>
+              <a:buSzPct val="100000"/>
+              <a:buChar char="•"/>
+            </a:pPr>
+            <a:r>
+              <a:rPr lang="en-US" sz="1200" dirty="0">
+                <a:solidFill>
+                  <a:srgbClr val="1A1A1A"/>
+                </a:solidFill>
+                <a:latin typeface="Georgia" pitchFamily="34" charset="0"/>
+                <a:ea typeface="Georgia" pitchFamily="34" charset="-122"/>
+                <a:cs typeface="Georgia" pitchFamily="34" charset="-120"/>
+              </a:rPr>
+              <a:t>This is many students' first time reading a Sanskrit verse. Honour the moment.</a:t>
+            </a:r>
+            <a:endParaRPr lang="en-US" sz="1200" dirty="0"/>
+          </a:p>
+        </p:txBody>
+      </p:sp>
+      <p:sp>
+        <p:nvSpPr>
+          <p:cNvPr id="5" name="Text 3"/>
+          <p:cNvSpPr/>
+          <p:nvPr/>
+        </p:nvSpPr>
+        <p:spPr>
+          <a:xfrm>
+            <a:off x="406301" y="4434929"/>
+            <a:ext cx="8498026" cy="213271"/>
+          </a:xfrm>
+          <a:prstGeom prst="rect">
+            <a:avLst/>
+          </a:prstGeom>
+          <a:noFill/>
+          <a:ln/>
+        </p:spPr>
+        <p:txBody>
+          <a:bodyPr wrap="square" lIns="0" tIns="0" rIns="0" bIns="0" rtlCol="0" anchor="t"/>
+          <a:lstStyle/>
+          <a:p>
+            <a:pPr algn="l" indent="0" marL="0">
+              <a:lnSpc>
+                <a:spcPts val="1680"/>
+              </a:lnSpc>
+              <a:spcBef>
+                <a:spcPts val="300"/>
+              </a:spcBef>
+              <a:spcAft>
+                <a:spcPts val="300"/>
+              </a:spcAft>
+              <a:buNone/>
+            </a:pPr>
+            <a:r>
+              <a:rPr lang="en-US" sz="1200" dirty="0">
+                <a:solidFill>
+                  <a:srgbClr val="1A1A1A"/>
+                </a:solidFill>
+                <a:latin typeface="Georgia" pitchFamily="34" charset="0"/>
+                <a:ea typeface="Georgia" pitchFamily="34" charset="-122"/>
+                <a:cs typeface="Georgia" pitchFamily="34" charset="-120"/>
+              </a:rPr>
+              <a:t>Senior ·  · IKS Curriculum</a:t>
+            </a:r>
+            <a:endParaRPr lang="en-US" sz="1200" dirty="0"/>
+          </a:p>
+        </p:txBody>
+      </p:sp>
+    </p:spTree>
+  </p:cSld>
+  <p:clrMapOvr>
+    <a:masterClrMapping/>
+  </p:clrMapOvr>
+</p:sld>
+</file>
+
+<file path=ppt/slides/slide14.xml><?xml version="1.0" encoding="utf-8"?>
+<p:sld xmlns:a="http://schemas.openxmlformats.org/drawingml/2006/main" xmlns:r="http://schemas.openxmlformats.org/officeDocument/2006/relationships" xmlns:p="http://schemas.openxmlformats.org/presentationml/2006/main">
+  <p:cSld name="Slide 14">
+    <p:bg>
+      <p:bgPr>
+        <a:solidFill>
+          <a:srgbClr val="FAF7F2"/>
+        </a:solidFill>
+      </p:bgPr>
+    </p:bg>
+    <p:spTree>
+      <p:nvGrpSpPr>
+        <p:cNvPr id="1" name=""/>
+        <p:cNvGrpSpPr/>
+        <p:nvPr/>
+      </p:nvGrpSpPr>
+      <p:grpSpPr>
+        <a:xfrm>
+          <a:off x="0" y="0"/>
+          <a:ext cx="0" cy="0"/>
+          <a:chOff x="0" y="0"/>
+          <a:chExt cx="0" cy="0"/>
+        </a:xfrm>
+      </p:grpSpPr>
+      <p:sp>
+        <p:nvSpPr>
+          <p:cNvPr id="2" name="Text 0"/>
+          <p:cNvSpPr/>
+          <p:nvPr/>
+        </p:nvSpPr>
+        <p:spPr>
+          <a:xfrm>
+            <a:off x="0" y="0"/>
+            <a:ext cx="9144000" cy="101501"/>
+          </a:xfrm>
+          <a:prstGeom prst="rect">
+            <a:avLst/>
+          </a:prstGeom>
+          <a:solidFill>
+            <a:srgbClr val="5D1D2E"/>
+          </a:solidFill>
+          <a:ln/>
+        </p:spPr>
+        <p:txBody>
+          <a:bodyPr wrap="square" rtlCol="0" anchor="ctr"/>
+          <a:lstStyle/>
+          <a:p>
+            <a:pPr indent="0" marL="0">
+              <a:buNone/>
+            </a:pPr>
+            <a:endParaRPr lang="en-US" dirty="0"/>
+          </a:p>
+        </p:txBody>
+      </p:sp>
+      <p:sp>
+        <p:nvSpPr>
+          <p:cNvPr id="3" name="Text 1"/>
+          <p:cNvSpPr/>
+          <p:nvPr/>
+        </p:nvSpPr>
+        <p:spPr>
+          <a:xfrm>
+            <a:off x="406301" y="457051"/>
+            <a:ext cx="8498026" cy="274290"/>
+          </a:xfrm>
+          <a:prstGeom prst="rect">
+            <a:avLst/>
+          </a:prstGeom>
+          <a:noFill/>
+          <a:ln/>
+        </p:spPr>
+        <p:txBody>
+          <a:bodyPr wrap="square" lIns="0" tIns="0" rIns="0" bIns="0" rtlCol="0" anchor="t"/>
+          <a:lstStyle/>
+          <a:p>
+            <a:pPr algn="l" indent="0" marL="0">
+              <a:lnSpc>
+                <a:spcPts val="2160"/>
+              </a:lnSpc>
+              <a:spcBef>
+                <a:spcPts val="600"/>
+              </a:spcBef>
+              <a:spcAft>
+                <a:spcPts val="800"/>
+              </a:spcAft>
+              <a:buNone/>
+            </a:pPr>
+            <a:r>
+              <a:rPr lang="en-US" sz="1800" b="1" dirty="0">
+                <a:solidFill>
+                  <a:srgbClr val="997929"/>
+                </a:solidFill>
+                <a:latin typeface="Times New Roman" pitchFamily="34" charset="0"/>
+                <a:ea typeface="Times New Roman" pitchFamily="34" charset="-122"/>
+                <a:cs typeface="Times New Roman" pitchFamily="34" charset="-120"/>
+              </a:rPr>
+              <a:t>Citation(s) used</a:t>
+            </a:r>
+            <a:endParaRPr lang="en-US" sz="1800" dirty="0"/>
+          </a:p>
+        </p:txBody>
+      </p:sp>
+      <p:sp>
+        <p:nvSpPr>
+          <p:cNvPr id="4" name="Text 2"/>
+          <p:cNvSpPr/>
+          <p:nvPr/>
+        </p:nvSpPr>
+        <p:spPr>
+          <a:xfrm>
+            <a:off x="634901" y="883593"/>
+            <a:ext cx="8102798" cy="300930"/>
+          </a:xfrm>
+          <a:prstGeom prst="rect">
+            <a:avLst/>
+          </a:prstGeom>
+          <a:noFill/>
+          <a:ln/>
+        </p:spPr>
+        <p:txBody>
+          <a:bodyPr wrap="square" lIns="0" tIns="0" rIns="0" bIns="0" rtlCol="0" anchor="t"/>
+          <a:lstStyle/>
+          <a:p>
+            <a:pPr algn="l" marL="342900" indent="-342900">
+              <a:lnSpc>
+                <a:spcPts val="1620"/>
+              </a:lnSpc>
+              <a:spcAft>
+                <a:spcPts val="300"/>
+              </a:spcAft>
+              <a:buSzPct val="100000"/>
+              <a:buChar char="•"/>
+            </a:pPr>
+            <a:r>
+              <a:rPr lang="en-US" sz="1200" dirty="0">
+                <a:solidFill>
+                  <a:srgbClr val="1A1A1A"/>
+                </a:solidFill>
+                <a:latin typeface="Georgia" pitchFamily="34" charset="0"/>
+                <a:ea typeface="Georgia" pitchFamily="34" charset="-122"/>
+                <a:cs typeface="Georgia" pitchFamily="34" charset="-120"/>
+              </a:rPr>
+              <a:t>SB 3.26.36 — vidya-karana RAG cache </a:t>
+            </a:r>
+            <a:pPr algn="l" indent="0" marL="0">
+              <a:lnSpc>
+                <a:spcPts val="1620"/>
+              </a:lnSpc>
               <a:spcAft>
                 <a:spcPts val="300"/>
               </a:spcAft>
@@ -2345,7 +3624,7 @@
                 <a:ea typeface="Times New Roman" pitchFamily="34" charset="-122"/>
                 <a:cs typeface="Times New Roman" pitchFamily="34" charset="-120"/>
               </a:rPr>
-              <a:t>Materials</a:t>
+              <a:t>Learning objective</a:t>
             </a:r>
             <a:endParaRPr lang="en-US" sz="1800" dirty="0"/>
           </a:p>
@@ -2360,7 +3639,7 @@
         <p:spPr>
           <a:xfrm>
             <a:off x="406301" y="870942"/>
-            <a:ext cx="8498026" cy="436066"/>
+            <a:ext cx="8498026" cy="213271"/>
           </a:xfrm>
           <a:prstGeom prst="rect">
             <a:avLst/>
@@ -2393,53 +3672,7 @@
                 <a:ea typeface="Georgia" pitchFamily="34" charset="-122"/>
                 <a:cs typeface="Georgia" pitchFamily="34" charset="-120"/>
               </a:rPr>
-              <a:t>– Printed handout: SB 3.26.36 in Devanāgarī, IAST, word-by-word gloss, continuous translation – Formative quiz (</a:t>
-            </a:r>
-            <a:pPr algn="l" indent="0" marL="0">
-              <a:lnSpc>
-                <a:spcPts val="1680"/>
-              </a:lnSpc>
-              <a:spcBef>
-                <a:spcPts val="300"/>
-              </a:spcBef>
-              <a:spcAft>
-                <a:spcPts val="300"/>
-              </a:spcAft>
-              <a:buNone/>
-            </a:pPr>
-            <a:r>
-              <a:rPr lang="en-US" sz="1200" dirty="0">
-                <a:solidFill>
-                  <a:srgbClr val="1A1A1A"/>
-                </a:solidFill>
-                <a:latin typeface="Georgia" pitchFamily="34" charset="0"/>
-                <a:ea typeface="Georgia" pitchFamily="34" charset="-122"/>
-                <a:cs typeface="Georgia" pitchFamily="34" charset="-120"/>
-              </a:rPr>
-              <a:t>quizzes/formative.md</a:t>
-            </a:r>
-            <a:pPr algn="l" indent="0" marL="0">
-              <a:lnSpc>
-                <a:spcPts val="1680"/>
-              </a:lnSpc>
-              <a:spcBef>
-                <a:spcPts val="300"/>
-              </a:spcBef>
-              <a:spcAft>
-                <a:spcPts val="300"/>
-              </a:spcAft>
-              <a:buNone/>
-            </a:pPr>
-            <a:r>
-              <a:rPr lang="en-US" sz="1200" dirty="0">
-                <a:solidFill>
-                  <a:srgbClr val="1A1A1A"/>
-                </a:solidFill>
-                <a:latin typeface="Georgia" pitchFamily="34" charset="0"/>
-                <a:ea typeface="Georgia" pitchFamily="34" charset="-122"/>
-                <a:cs typeface="Georgia" pitchFamily="34" charset="-120"/>
-              </a:rPr>
-              <a:t> Part B)</a:t>
+              <a:t>Students read SB 3.26.36 in IAST with word-by-word gloss and submit the formative quiz.</a:t>
             </a:r>
             <a:endParaRPr lang="en-US" sz="1200" dirty="0"/>
           </a:p>
@@ -2597,7 +3830,7 @@
                 <a:ea typeface="Times New Roman" pitchFamily="34" charset="-122"/>
                 <a:cs typeface="Times New Roman" pitchFamily="34" charset="-120"/>
               </a:rPr>
-              <a:t>Flow</a:t>
+              <a:t>Materials</a:t>
             </a:r>
             <a:endParaRPr lang="en-US" sz="1800" dirty="0"/>
           </a:p>
@@ -2606,6 +3839,116 @@
       <p:sp>
         <p:nvSpPr>
           <p:cNvPr id="4" name="Text 2"/>
+          <p:cNvSpPr/>
+          <p:nvPr/>
+        </p:nvSpPr>
+        <p:spPr>
+          <a:xfrm>
+            <a:off x="634901" y="883593"/>
+            <a:ext cx="8102798" cy="544711"/>
+          </a:xfrm>
+          <a:prstGeom prst="rect">
+            <a:avLst/>
+          </a:prstGeom>
+          <a:noFill/>
+          <a:ln/>
+        </p:spPr>
+        <p:txBody>
+          <a:bodyPr wrap="square" lIns="0" tIns="0" rIns="0" bIns="0" rtlCol="0" anchor="t"/>
+          <a:lstStyle/>
+          <a:p>
+            <a:pPr algn="l" marL="342900" indent="-342900">
+              <a:lnSpc>
+                <a:spcPts val="1620"/>
+              </a:lnSpc>
+              <a:spcAft>
+                <a:spcPts val="300"/>
+              </a:spcAft>
+              <a:buSzPct val="100000"/>
+              <a:buChar char="•"/>
+            </a:pPr>
+            <a:r>
+              <a:rPr lang="en-US" sz="1200" dirty="0">
+                <a:solidFill>
+                  <a:srgbClr val="1A1A1A"/>
+                </a:solidFill>
+                <a:latin typeface="Georgia" pitchFamily="34" charset="0"/>
+                <a:ea typeface="Georgia" pitchFamily="34" charset="-122"/>
+                <a:cs typeface="Georgia" pitchFamily="34" charset="-120"/>
+              </a:rPr>
+              <a:t>Printed handout: SB 3.26.36 in Devanāgarī, IAST, word-by-word gloss, continuous translation</a:t>
+            </a:r>
+            <a:endParaRPr lang="en-US" sz="1200" dirty="0"/>
+          </a:p>
+          <a:p>
+            <a:pPr algn="l" marL="342900" indent="-342900">
+              <a:lnSpc>
+                <a:spcPts val="1620"/>
+              </a:lnSpc>
+              <a:spcAft>
+                <a:spcPts val="300"/>
+              </a:spcAft>
+              <a:buSzPct val="100000"/>
+              <a:buChar char="•"/>
+            </a:pPr>
+            <a:r>
+              <a:rPr lang="en-US" sz="1200" dirty="0">
+                <a:solidFill>
+                  <a:srgbClr val="1A1A1A"/>
+                </a:solidFill>
+                <a:latin typeface="Georgia" pitchFamily="34" charset="0"/>
+                <a:ea typeface="Georgia" pitchFamily="34" charset="-122"/>
+                <a:cs typeface="Georgia" pitchFamily="34" charset="-120"/>
+              </a:rPr>
+              <a:t>Formative quiz (</a:t>
+            </a:r>
+            <a:pPr algn="l" indent="0" marL="0">
+              <a:lnSpc>
+                <a:spcPts val="1620"/>
+              </a:lnSpc>
+              <a:spcAft>
+                <a:spcPts val="300"/>
+              </a:spcAft>
+              <a:buNone/>
+            </a:pPr>
+            <a:r>
+              <a:rPr lang="en-US" sz="1200" dirty="0">
+                <a:solidFill>
+                  <a:srgbClr val="1A1A1A"/>
+                </a:solidFill>
+                <a:latin typeface="Georgia" pitchFamily="34" charset="0"/>
+                <a:ea typeface="Georgia" pitchFamily="34" charset="-122"/>
+                <a:cs typeface="Georgia" pitchFamily="34" charset="-120"/>
+              </a:rPr>
+              <a:t>quizzes/formative.md</a:t>
+            </a:r>
+            <a:pPr algn="l" indent="0" marL="0">
+              <a:lnSpc>
+                <a:spcPts val="1620"/>
+              </a:lnSpc>
+              <a:spcAft>
+                <a:spcPts val="300"/>
+              </a:spcAft>
+              <a:buNone/>
+            </a:pPr>
+            <a:r>
+              <a:rPr lang="en-US" sz="1200" dirty="0">
+                <a:solidFill>
+                  <a:srgbClr val="1A1A1A"/>
+                </a:solidFill>
+                <a:latin typeface="Georgia" pitchFamily="34" charset="0"/>
+                <a:ea typeface="Georgia" pitchFamily="34" charset="-122"/>
+                <a:cs typeface="Georgia" pitchFamily="34" charset="-120"/>
+              </a:rPr>
+              <a:t> Part B)</a:t>
+            </a:r>
+            <a:endParaRPr lang="en-US" sz="1200" dirty="0"/>
+          </a:p>
+        </p:txBody>
+      </p:sp>
+      <p:sp>
+        <p:nvSpPr>
+          <p:cNvPr id="5" name="Text 3"/>
           <p:cNvSpPr/>
           <p:nvPr/>
         </p:nvSpPr>
@@ -2755,7 +4098,7 @@
                 <a:ea typeface="Times New Roman" pitchFamily="34" charset="-122"/>
                 <a:cs typeface="Times New Roman" pitchFamily="34" charset="-120"/>
               </a:rPr>
-              <a:t>Warm-up (5 min)</a:t>
+              <a:t>Flow</a:t>
             </a:r>
             <a:endParaRPr lang="en-US" sz="1800" dirty="0"/>
           </a:p>
@@ -2764,54 +4107,6 @@
       <p:sp>
         <p:nvSpPr>
           <p:cNvPr id="4" name="Text 2"/>
-          <p:cNvSpPr/>
-          <p:nvPr/>
-        </p:nvSpPr>
-        <p:spPr>
-          <a:xfrm>
-            <a:off x="406301" y="870942"/>
-            <a:ext cx="8498026" cy="213271"/>
-          </a:xfrm>
-          <a:prstGeom prst="rect">
-            <a:avLst/>
-          </a:prstGeom>
-          <a:noFill/>
-          <a:ln/>
-        </p:spPr>
-        <p:txBody>
-          <a:bodyPr wrap="square" lIns="0" tIns="0" rIns="0" bIns="0" rtlCol="0" anchor="t"/>
-          <a:lstStyle/>
-          <a:p>
-            <a:pPr algn="l" indent="0" marL="0">
-              <a:lnSpc>
-                <a:spcPts val="1680"/>
-              </a:lnSpc>
-              <a:spcBef>
-                <a:spcPts val="300"/>
-              </a:spcBef>
-              <a:spcAft>
-                <a:spcPts val="300"/>
-              </a:spcAft>
-              <a:buNone/>
-            </a:pPr>
-            <a:r>
-              <a:rPr lang="en-US" sz="1200" dirty="0">
-                <a:solidFill>
-                  <a:srgbClr val="1A1A1A"/>
-                </a:solidFill>
-                <a:latin typeface="Georgia" pitchFamily="34" charset="0"/>
-                <a:ea typeface="Georgia" pitchFamily="34" charset="-122"/>
-                <a:cs typeface="Georgia" pitchFamily="34" charset="-120"/>
-              </a:rPr>
-              <a:t>– Hand out the printed verse. Quick recall: yesterday's Greek comparison.</a:t>
-            </a:r>
-            <a:endParaRPr lang="en-US" sz="1200" dirty="0"/>
-          </a:p>
-        </p:txBody>
-      </p:sp>
-      <p:sp>
-        <p:nvSpPr>
-          <p:cNvPr id="5" name="Text 3"/>
           <p:cNvSpPr/>
           <p:nvPr/>
         </p:nvSpPr>
@@ -2961,7 +4256,7 @@
                 <a:ea typeface="Times New Roman" pitchFamily="34" charset="-122"/>
                 <a:cs typeface="Times New Roman" pitchFamily="34" charset="-120"/>
               </a:rPr>
-              <a:t>Reading (15 min)</a:t>
+              <a:t>Warm-up (5 min)</a:t>
             </a:r>
             <a:endParaRPr lang="en-US" sz="1800" dirty="0"/>
           </a:p>
@@ -2999,26 +4294,6 @@
               <a:buChar char="•"/>
             </a:pPr>
             <a:r>
-              <a:rPr lang="en-US" sz="1200" b="1" dirty="0">
-                <a:solidFill>
-                  <a:srgbClr val="1A1A1A"/>
-                </a:solidFill>
-                <a:latin typeface="Georgia" pitchFamily="34" charset="0"/>
-                <a:ea typeface="Georgia" pitchFamily="34" charset="-122"/>
-                <a:cs typeface="Georgia" pitchFamily="34" charset="-120"/>
-              </a:rPr>
-              <a:t>First read — sound.</a:t>
-            </a:r>
-            <a:pPr algn="l" indent="0" marL="0">
-              <a:lnSpc>
-                <a:spcPts val="1620"/>
-              </a:lnSpc>
-              <a:spcAft>
-                <a:spcPts val="300"/>
-              </a:spcAft>
-              <a:buNone/>
-            </a:pPr>
-            <a:r>
               <a:rPr lang="en-US" sz="1200" dirty="0">
                 <a:solidFill>
                   <a:srgbClr val="1A1A1A"/>
@@ -3027,7 +4302,7 @@
                 <a:ea typeface="Georgia" pitchFamily="34" charset="-122"/>
                 <a:cs typeface="Georgia" pitchFamily="34" charset="-120"/>
               </a:rPr>
-              <a:t> Teacher reads the IAST aloud once. Students listen.</a:t>
+              <a:t>Hand out the printed verse. Quick recall: yesterday's Greek comparison.</a:t>
             </a:r>
             <a:endParaRPr lang="en-US" sz="1200" dirty="0"/>
           </a:p>
@@ -3041,932 +4316,7 @@
         </p:nvSpPr>
         <p:spPr>
           <a:xfrm>
-            <a:off x="406301" y="1254323"/>
-            <a:ext cx="8498026" cy="213271"/>
-          </a:xfrm>
-          <a:prstGeom prst="rect">
-            <a:avLst/>
-          </a:prstGeom>
-          <a:noFill/>
-          <a:ln/>
-        </p:spPr>
-        <p:txBody>
-          <a:bodyPr wrap="square" lIns="0" tIns="0" rIns="0" bIns="0" rtlCol="0" anchor="t"/>
-          <a:lstStyle/>
-          <a:p>
-            <a:pPr algn="l" indent="0" marL="0">
-              <a:lnSpc>
-                <a:spcPts val="1680"/>
-              </a:lnSpc>
-              <a:spcBef>
-                <a:spcPts val="300"/>
-              </a:spcBef>
-              <a:spcAft>
-                <a:spcPts val="300"/>
-              </a:spcAft>
-              <a:buNone/>
-            </a:pPr>
-            <a:r>
-              <a:rPr lang="en-US" sz="1200" dirty="0">
-                <a:solidFill>
-                  <a:srgbClr val="1A1A1A"/>
-                </a:solidFill>
-                <a:latin typeface="Georgia" pitchFamily="34" charset="0"/>
-                <a:ea typeface="Georgia" pitchFamily="34" charset="-122"/>
-                <a:cs typeface="Georgia" pitchFamily="34" charset="-120"/>
-              </a:rPr>
-              <a:t>&gt; </a:t>
-            </a:r>
-            <a:pPr algn="l" indent="0" marL="0">
-              <a:lnSpc>
-                <a:spcPts val="1680"/>
-              </a:lnSpc>
-              <a:spcBef>
-                <a:spcPts val="300"/>
-              </a:spcBef>
-              <a:spcAft>
-                <a:spcPts val="300"/>
-              </a:spcAft>
-              <a:buNone/>
-            </a:pPr>
-            <a:r>
-              <a:rPr lang="en-US" sz="1200" i="1" dirty="0">
-                <a:solidFill>
-                  <a:srgbClr val="1A1A1A"/>
-                </a:solidFill>
-                <a:latin typeface="Georgia" pitchFamily="34" charset="0"/>
-                <a:ea typeface="Georgia" pitchFamily="34" charset="-122"/>
-                <a:cs typeface="Georgia" pitchFamily="34" charset="-120"/>
-              </a:rPr>
-              <a:t>mṛdutvaṁ kaṭhinatvaṁ ca śaityam uṣṇatvam eva ca</a:t>
-            </a:r>
-            <a:pPr algn="l" indent="0" marL="0">
-              <a:lnSpc>
-                <a:spcPts val="1680"/>
-              </a:lnSpc>
-              <a:spcBef>
-                <a:spcPts val="300"/>
-              </a:spcBef>
-              <a:spcAft>
-                <a:spcPts val="300"/>
-              </a:spcAft>
-              <a:buNone/>
-            </a:pPr>
-            <a:r>
-              <a:rPr lang="en-US" sz="1200" dirty="0">
-                <a:solidFill>
-                  <a:srgbClr val="1A1A1A"/>
-                </a:solidFill>
-                <a:latin typeface="Georgia" pitchFamily="34" charset="0"/>
-                <a:ea typeface="Georgia" pitchFamily="34" charset="-122"/>
-                <a:cs typeface="Georgia" pitchFamily="34" charset="-120"/>
-              </a:rPr>
-              <a:t> &gt; </a:t>
-            </a:r>
-            <a:pPr algn="l" indent="0" marL="0">
-              <a:lnSpc>
-                <a:spcPts val="1680"/>
-              </a:lnSpc>
-              <a:spcBef>
-                <a:spcPts val="300"/>
-              </a:spcBef>
-              <a:spcAft>
-                <a:spcPts val="300"/>
-              </a:spcAft>
-              <a:buNone/>
-            </a:pPr>
-            <a:r>
-              <a:rPr lang="en-US" sz="1200" i="1" dirty="0">
-                <a:solidFill>
-                  <a:srgbClr val="1A1A1A"/>
-                </a:solidFill>
-                <a:latin typeface="Georgia" pitchFamily="34" charset="0"/>
-                <a:ea typeface="Georgia" pitchFamily="34" charset="-122"/>
-                <a:cs typeface="Georgia" pitchFamily="34" charset="-120"/>
-              </a:rPr>
-              <a:t>etat sparśasya sparśatvaṁ tanmātratvaṁ nabhasvataḥ</a:t>
-            </a:r>
-            <a:endParaRPr lang="en-US" sz="1200" dirty="0"/>
-          </a:p>
-        </p:txBody>
-      </p:sp>
-      <p:sp>
-        <p:nvSpPr>
-          <p:cNvPr id="6" name="Text 4"/>
-          <p:cNvSpPr/>
-          <p:nvPr/>
-        </p:nvSpPr>
-        <p:spPr>
-          <a:xfrm>
-            <a:off x="634901" y="1556445"/>
-            <a:ext cx="8102798" cy="281880"/>
-          </a:xfrm>
-          <a:prstGeom prst="rect">
-            <a:avLst/>
-          </a:prstGeom>
-          <a:noFill/>
-          <a:ln/>
-        </p:spPr>
-        <p:txBody>
-          <a:bodyPr wrap="square" lIns="0" tIns="0" rIns="0" bIns="0" rtlCol="0" anchor="t"/>
-          <a:lstStyle/>
-          <a:p>
-            <a:pPr algn="l" marL="342900" indent="-342900">
-              <a:lnSpc>
-                <a:spcPts val="1620"/>
-              </a:lnSpc>
-              <a:spcAft>
-                <a:spcPts val="300"/>
-              </a:spcAft>
-              <a:buSzPct val="100000"/>
-              <a:buChar char="•"/>
-            </a:pPr>
-            <a:r>
-              <a:rPr lang="en-US" sz="1200" b="1" dirty="0">
-                <a:solidFill>
-                  <a:srgbClr val="1A1A1A"/>
-                </a:solidFill>
-                <a:latin typeface="Georgia" pitchFamily="34" charset="0"/>
-                <a:ea typeface="Georgia" pitchFamily="34" charset="-122"/>
-                <a:cs typeface="Georgia" pitchFamily="34" charset="-120"/>
-              </a:rPr>
-              <a:t>Second read — meaning.</a:t>
-            </a:r>
-            <a:pPr algn="l" indent="0" marL="0">
-              <a:lnSpc>
-                <a:spcPts val="1620"/>
-              </a:lnSpc>
-              <a:spcAft>
-                <a:spcPts val="300"/>
-              </a:spcAft>
-              <a:buNone/>
-            </a:pPr>
-            <a:r>
-              <a:rPr lang="en-US" sz="1200" dirty="0">
-                <a:solidFill>
-                  <a:srgbClr val="1A1A1A"/>
-                </a:solidFill>
-                <a:latin typeface="Georgia" pitchFamily="34" charset="0"/>
-                <a:ea typeface="Georgia" pitchFamily="34" charset="-122"/>
-                <a:cs typeface="Georgia" pitchFamily="34" charset="-120"/>
-              </a:rPr>
-              <a:t> Students follow the word-by-word gloss:</a:t>
-            </a:r>
-            <a:endParaRPr lang="en-US" sz="1200" dirty="0"/>
-          </a:p>
-        </p:txBody>
-      </p:sp>
-      <p:sp>
-        <p:nvSpPr>
-          <p:cNvPr id="7" name="Text 5"/>
-          <p:cNvSpPr/>
-          <p:nvPr/>
-        </p:nvSpPr>
-        <p:spPr>
-          <a:xfrm>
-            <a:off x="406301" y="1927175"/>
-            <a:ext cx="8498026" cy="213271"/>
-          </a:xfrm>
-          <a:prstGeom prst="rect">
-            <a:avLst/>
-          </a:prstGeom>
-          <a:noFill/>
-          <a:ln/>
-        </p:spPr>
-        <p:txBody>
-          <a:bodyPr wrap="square" lIns="0" tIns="0" rIns="0" bIns="0" rtlCol="0" anchor="t"/>
-          <a:lstStyle/>
-          <a:p>
-            <a:pPr algn="l" indent="0" marL="0">
-              <a:lnSpc>
-                <a:spcPts val="1680"/>
-              </a:lnSpc>
-              <a:spcBef>
-                <a:spcPts val="300"/>
-              </a:spcBef>
-              <a:spcAft>
-                <a:spcPts val="300"/>
-              </a:spcAft>
-              <a:buNone/>
-            </a:pPr>
-            <a:r>
-              <a:rPr lang="en-US" sz="1200" i="1" dirty="0">
-                <a:solidFill>
-                  <a:srgbClr val="1A1A1A"/>
-                </a:solidFill>
-                <a:latin typeface="Georgia" pitchFamily="34" charset="0"/>
-                <a:ea typeface="Georgia" pitchFamily="34" charset="-122"/>
-                <a:cs typeface="Georgia" pitchFamily="34" charset="-120"/>
-              </a:rPr>
-              <a:t>Each row: Sanskrit · Gloss.</a:t>
-            </a:r>
-            <a:endParaRPr lang="en-US" sz="1200" dirty="0"/>
-          </a:p>
-        </p:txBody>
-      </p:sp>
-      <p:sp>
-        <p:nvSpPr>
-          <p:cNvPr id="8" name="Text 6"/>
-          <p:cNvSpPr/>
-          <p:nvPr/>
-        </p:nvSpPr>
-        <p:spPr>
-          <a:xfrm>
-            <a:off x="634901" y="2229296"/>
-            <a:ext cx="8102798" cy="2719685"/>
-          </a:xfrm>
-          <a:prstGeom prst="rect">
-            <a:avLst/>
-          </a:prstGeom>
-          <a:noFill/>
-          <a:ln/>
-        </p:spPr>
-        <p:txBody>
-          <a:bodyPr wrap="square" lIns="0" tIns="0" rIns="0" bIns="0" rtlCol="0" anchor="t"/>
-          <a:lstStyle/>
-          <a:p>
-            <a:pPr algn="l" marL="342900" indent="-342900">
-              <a:lnSpc>
-                <a:spcPts val="1620"/>
-              </a:lnSpc>
-              <a:spcAft>
-                <a:spcPts val="300"/>
-              </a:spcAft>
-              <a:buSzPct val="100000"/>
-              <a:buChar char="•"/>
-            </a:pPr>
-            <a:r>
-              <a:rPr lang="en-US" sz="1200" b="1" dirty="0">
-                <a:solidFill>
-                  <a:srgbClr val="1A1A1A"/>
-                </a:solidFill>
-                <a:latin typeface="Georgia" pitchFamily="34" charset="0"/>
-                <a:ea typeface="Georgia" pitchFamily="34" charset="-122"/>
-                <a:cs typeface="Georgia" pitchFamily="34" charset="-120"/>
-              </a:rPr>
-              <a:t>mṛdutvam</a:t>
-            </a:r>
-            <a:pPr algn="l" indent="0" marL="0">
-              <a:lnSpc>
-                <a:spcPts val="1620"/>
-              </a:lnSpc>
-              <a:spcAft>
-                <a:spcPts val="300"/>
-              </a:spcAft>
-              <a:buNone/>
-            </a:pPr>
-            <a:r>
-              <a:rPr lang="en-US" sz="1200" dirty="0">
-                <a:solidFill>
-                  <a:srgbClr val="1A1A1A"/>
-                </a:solidFill>
-                <a:latin typeface="Georgia" pitchFamily="34" charset="0"/>
-                <a:ea typeface="Georgia" pitchFamily="34" charset="-122"/>
-                <a:cs typeface="Georgia" pitchFamily="34" charset="-120"/>
-              </a:rPr>
-              <a:t> — softness (nominative neuter)</a:t>
-            </a:r>
-            <a:endParaRPr lang="en-US" sz="1200" dirty="0"/>
-          </a:p>
-          <a:p>
-            <a:pPr algn="l" marL="342900" indent="-342900">
-              <a:lnSpc>
-                <a:spcPts val="1620"/>
-              </a:lnSpc>
-              <a:spcAft>
-                <a:spcPts val="300"/>
-              </a:spcAft>
-              <a:buSzPct val="100000"/>
-              <a:buChar char="•"/>
-            </a:pPr>
-            <a:r>
-              <a:rPr lang="en-US" sz="1200" b="1" dirty="0">
-                <a:solidFill>
-                  <a:srgbClr val="1A1A1A"/>
-                </a:solidFill>
-                <a:latin typeface="Georgia" pitchFamily="34" charset="0"/>
-                <a:ea typeface="Georgia" pitchFamily="34" charset="-122"/>
-                <a:cs typeface="Georgia" pitchFamily="34" charset="-120"/>
-              </a:rPr>
-              <a:t>kaṭhinatvam</a:t>
-            </a:r>
-            <a:pPr algn="l" indent="0" marL="0">
-              <a:lnSpc>
-                <a:spcPts val="1620"/>
-              </a:lnSpc>
-              <a:spcAft>
-                <a:spcPts val="300"/>
-              </a:spcAft>
-              <a:buNone/>
-            </a:pPr>
-            <a:r>
-              <a:rPr lang="en-US" sz="1200" dirty="0">
-                <a:solidFill>
-                  <a:srgbClr val="1A1A1A"/>
-                </a:solidFill>
-                <a:latin typeface="Georgia" pitchFamily="34" charset="0"/>
-                <a:ea typeface="Georgia" pitchFamily="34" charset="-122"/>
-                <a:cs typeface="Georgia" pitchFamily="34" charset="-120"/>
-              </a:rPr>
-              <a:t> — hardness</a:t>
-            </a:r>
-            <a:endParaRPr lang="en-US" sz="1200" dirty="0"/>
-          </a:p>
-          <a:p>
-            <a:pPr algn="l" marL="342900" indent="-342900">
-              <a:lnSpc>
-                <a:spcPts val="1620"/>
-              </a:lnSpc>
-              <a:spcAft>
-                <a:spcPts val="300"/>
-              </a:spcAft>
-              <a:buSzPct val="100000"/>
-              <a:buChar char="•"/>
-            </a:pPr>
-            <a:r>
-              <a:rPr lang="en-US" sz="1200" b="1" dirty="0">
-                <a:solidFill>
-                  <a:srgbClr val="1A1A1A"/>
-                </a:solidFill>
-                <a:latin typeface="Georgia" pitchFamily="34" charset="0"/>
-                <a:ea typeface="Georgia" pitchFamily="34" charset="-122"/>
-                <a:cs typeface="Georgia" pitchFamily="34" charset="-120"/>
-              </a:rPr>
-              <a:t>ca</a:t>
-            </a:r>
-            <a:pPr algn="l" indent="0" marL="0">
-              <a:lnSpc>
-                <a:spcPts val="1620"/>
-              </a:lnSpc>
-              <a:spcAft>
-                <a:spcPts val="300"/>
-              </a:spcAft>
-              <a:buNone/>
-            </a:pPr>
-            <a:r>
-              <a:rPr lang="en-US" sz="1200" dirty="0">
-                <a:solidFill>
-                  <a:srgbClr val="1A1A1A"/>
-                </a:solidFill>
-                <a:latin typeface="Georgia" pitchFamily="34" charset="0"/>
-                <a:ea typeface="Georgia" pitchFamily="34" charset="-122"/>
-                <a:cs typeface="Georgia" pitchFamily="34" charset="-120"/>
-              </a:rPr>
-              <a:t> — and</a:t>
-            </a:r>
-            <a:endParaRPr lang="en-US" sz="1200" dirty="0"/>
-          </a:p>
-          <a:p>
-            <a:pPr algn="l" marL="342900" indent="-342900">
-              <a:lnSpc>
-                <a:spcPts val="1620"/>
-              </a:lnSpc>
-              <a:spcAft>
-                <a:spcPts val="300"/>
-              </a:spcAft>
-              <a:buSzPct val="100000"/>
-              <a:buChar char="•"/>
-            </a:pPr>
-            <a:r>
-              <a:rPr lang="en-US" sz="1200" b="1" dirty="0">
-                <a:solidFill>
-                  <a:srgbClr val="1A1A1A"/>
-                </a:solidFill>
-                <a:latin typeface="Georgia" pitchFamily="34" charset="0"/>
-                <a:ea typeface="Georgia" pitchFamily="34" charset="-122"/>
-                <a:cs typeface="Georgia" pitchFamily="34" charset="-120"/>
-              </a:rPr>
-              <a:t>śaityam</a:t>
-            </a:r>
-            <a:pPr algn="l" indent="0" marL="0">
-              <a:lnSpc>
-                <a:spcPts val="1620"/>
-              </a:lnSpc>
-              <a:spcAft>
-                <a:spcPts val="300"/>
-              </a:spcAft>
-              <a:buNone/>
-            </a:pPr>
-            <a:r>
-              <a:rPr lang="en-US" sz="1200" dirty="0">
-                <a:solidFill>
-                  <a:srgbClr val="1A1A1A"/>
-                </a:solidFill>
-                <a:latin typeface="Georgia" pitchFamily="34" charset="0"/>
-                <a:ea typeface="Georgia" pitchFamily="34" charset="-122"/>
-                <a:cs typeface="Georgia" pitchFamily="34" charset="-120"/>
-              </a:rPr>
-              <a:t> — cold</a:t>
-            </a:r>
-            <a:endParaRPr lang="en-US" sz="1200" dirty="0"/>
-          </a:p>
-          <a:p>
-            <a:pPr algn="l" marL="342900" indent="-342900">
-              <a:lnSpc>
-                <a:spcPts val="1620"/>
-              </a:lnSpc>
-              <a:spcAft>
-                <a:spcPts val="300"/>
-              </a:spcAft>
-              <a:buSzPct val="100000"/>
-              <a:buChar char="•"/>
-            </a:pPr>
-            <a:r>
-              <a:rPr lang="en-US" sz="1200" b="1" dirty="0">
-                <a:solidFill>
-                  <a:srgbClr val="1A1A1A"/>
-                </a:solidFill>
-                <a:latin typeface="Georgia" pitchFamily="34" charset="0"/>
-                <a:ea typeface="Georgia" pitchFamily="34" charset="-122"/>
-                <a:cs typeface="Georgia" pitchFamily="34" charset="-120"/>
-              </a:rPr>
-              <a:t>uṣṇatvam</a:t>
-            </a:r>
-            <a:pPr algn="l" indent="0" marL="0">
-              <a:lnSpc>
-                <a:spcPts val="1620"/>
-              </a:lnSpc>
-              <a:spcAft>
-                <a:spcPts val="300"/>
-              </a:spcAft>
-              <a:buNone/>
-            </a:pPr>
-            <a:r>
-              <a:rPr lang="en-US" sz="1200" dirty="0">
-                <a:solidFill>
-                  <a:srgbClr val="1A1A1A"/>
-                </a:solidFill>
-                <a:latin typeface="Georgia" pitchFamily="34" charset="0"/>
-                <a:ea typeface="Georgia" pitchFamily="34" charset="-122"/>
-                <a:cs typeface="Georgia" pitchFamily="34" charset="-120"/>
-              </a:rPr>
-              <a:t> — heat</a:t>
-            </a:r>
-            <a:endParaRPr lang="en-US" sz="1200" dirty="0"/>
-          </a:p>
-          <a:p>
-            <a:pPr algn="l" marL="342900" indent="-342900">
-              <a:lnSpc>
-                <a:spcPts val="1620"/>
-              </a:lnSpc>
-              <a:spcAft>
-                <a:spcPts val="300"/>
-              </a:spcAft>
-              <a:buSzPct val="100000"/>
-              <a:buChar char="•"/>
-            </a:pPr>
-            <a:r>
-              <a:rPr lang="en-US" sz="1200" b="1" dirty="0">
-                <a:solidFill>
-                  <a:srgbClr val="1A1A1A"/>
-                </a:solidFill>
-                <a:latin typeface="Georgia" pitchFamily="34" charset="0"/>
-                <a:ea typeface="Georgia" pitchFamily="34" charset="-122"/>
-                <a:cs typeface="Georgia" pitchFamily="34" charset="-120"/>
-              </a:rPr>
-              <a:t>eva ca</a:t>
-            </a:r>
-            <a:pPr algn="l" indent="0" marL="0">
-              <a:lnSpc>
-                <a:spcPts val="1620"/>
-              </a:lnSpc>
-              <a:spcAft>
-                <a:spcPts val="300"/>
-              </a:spcAft>
-              <a:buNone/>
-            </a:pPr>
-            <a:r>
-              <a:rPr lang="en-US" sz="1200" dirty="0">
-                <a:solidFill>
-                  <a:srgbClr val="1A1A1A"/>
-                </a:solidFill>
-                <a:latin typeface="Georgia" pitchFamily="34" charset="0"/>
-                <a:ea typeface="Georgia" pitchFamily="34" charset="-122"/>
-                <a:cs typeface="Georgia" pitchFamily="34" charset="-120"/>
-              </a:rPr>
-              <a:t> — as well</a:t>
-            </a:r>
-            <a:endParaRPr lang="en-US" sz="1200" dirty="0"/>
-          </a:p>
-          <a:p>
-            <a:pPr algn="l" marL="342900" indent="-342900">
-              <a:lnSpc>
-                <a:spcPts val="1620"/>
-              </a:lnSpc>
-              <a:spcAft>
-                <a:spcPts val="300"/>
-              </a:spcAft>
-              <a:buSzPct val="100000"/>
-              <a:buChar char="•"/>
-            </a:pPr>
-            <a:r>
-              <a:rPr lang="en-US" sz="1200" b="1" dirty="0">
-                <a:solidFill>
-                  <a:srgbClr val="1A1A1A"/>
-                </a:solidFill>
-                <a:latin typeface="Georgia" pitchFamily="34" charset="0"/>
-                <a:ea typeface="Georgia" pitchFamily="34" charset="-122"/>
-                <a:cs typeface="Georgia" pitchFamily="34" charset="-120"/>
-              </a:rPr>
-              <a:t>etat</a:t>
-            </a:r>
-            <a:pPr algn="l" indent="0" marL="0">
-              <a:lnSpc>
-                <a:spcPts val="1620"/>
-              </a:lnSpc>
-              <a:spcAft>
-                <a:spcPts val="300"/>
-              </a:spcAft>
-              <a:buNone/>
-            </a:pPr>
-            <a:r>
-              <a:rPr lang="en-US" sz="1200" dirty="0">
-                <a:solidFill>
-                  <a:srgbClr val="1A1A1A"/>
-                </a:solidFill>
-                <a:latin typeface="Georgia" pitchFamily="34" charset="0"/>
-                <a:ea typeface="Georgia" pitchFamily="34" charset="-122"/>
-                <a:cs typeface="Georgia" pitchFamily="34" charset="-120"/>
-              </a:rPr>
-              <a:t> — these</a:t>
-            </a:r>
-            <a:endParaRPr lang="en-US" sz="1200" dirty="0"/>
-          </a:p>
-          <a:p>
-            <a:pPr algn="l" marL="342900" indent="-342900">
-              <a:lnSpc>
-                <a:spcPts val="1620"/>
-              </a:lnSpc>
-              <a:spcAft>
-                <a:spcPts val="300"/>
-              </a:spcAft>
-              <a:buSzPct val="100000"/>
-              <a:buChar char="•"/>
-            </a:pPr>
-            <a:r>
-              <a:rPr lang="en-US" sz="1200" b="1" dirty="0">
-                <a:solidFill>
-                  <a:srgbClr val="1A1A1A"/>
-                </a:solidFill>
-                <a:latin typeface="Georgia" pitchFamily="34" charset="0"/>
-                <a:ea typeface="Georgia" pitchFamily="34" charset="-122"/>
-                <a:cs typeface="Georgia" pitchFamily="34" charset="-120"/>
-              </a:rPr>
-              <a:t>sparśasya</a:t>
-            </a:r>
-            <a:pPr algn="l" indent="0" marL="0">
-              <a:lnSpc>
-                <a:spcPts val="1620"/>
-              </a:lnSpc>
-              <a:spcAft>
-                <a:spcPts val="300"/>
-              </a:spcAft>
-              <a:buNone/>
-            </a:pPr>
-            <a:r>
-              <a:rPr lang="en-US" sz="1200" dirty="0">
-                <a:solidFill>
-                  <a:srgbClr val="1A1A1A"/>
-                </a:solidFill>
-                <a:latin typeface="Georgia" pitchFamily="34" charset="0"/>
-                <a:ea typeface="Georgia" pitchFamily="34" charset="-122"/>
-                <a:cs typeface="Georgia" pitchFamily="34" charset="-120"/>
-              </a:rPr>
-              <a:t> — of touch (genitive)</a:t>
-            </a:r>
-            <a:endParaRPr lang="en-US" sz="1200" dirty="0"/>
-          </a:p>
-          <a:p>
-            <a:pPr algn="l" marL="342900" indent="-342900">
-              <a:lnSpc>
-                <a:spcPts val="1620"/>
-              </a:lnSpc>
-              <a:spcAft>
-                <a:spcPts val="300"/>
-              </a:spcAft>
-              <a:buSzPct val="100000"/>
-              <a:buChar char="•"/>
-            </a:pPr>
-            <a:r>
-              <a:rPr lang="en-US" sz="1200" b="1" dirty="0">
-                <a:solidFill>
-                  <a:srgbClr val="1A1A1A"/>
-                </a:solidFill>
-                <a:latin typeface="Georgia" pitchFamily="34" charset="0"/>
-                <a:ea typeface="Georgia" pitchFamily="34" charset="-122"/>
-                <a:cs typeface="Georgia" pitchFamily="34" charset="-120"/>
-              </a:rPr>
-              <a:t>sparśatvam</a:t>
-            </a:r>
-            <a:pPr algn="l" indent="0" marL="0">
-              <a:lnSpc>
-                <a:spcPts val="1620"/>
-              </a:lnSpc>
-              <a:spcAft>
-                <a:spcPts val="300"/>
-              </a:spcAft>
-              <a:buNone/>
-            </a:pPr>
-            <a:r>
-              <a:rPr lang="en-US" sz="1200" dirty="0">
-                <a:solidFill>
-                  <a:srgbClr val="1A1A1A"/>
-                </a:solidFill>
-                <a:latin typeface="Georgia" pitchFamily="34" charset="0"/>
-                <a:ea typeface="Georgia" pitchFamily="34" charset="-122"/>
-                <a:cs typeface="Georgia" pitchFamily="34" charset="-120"/>
-              </a:rPr>
-              <a:t> — the touch-ness (= the defining quality of touch)</a:t>
-            </a:r>
-            <a:endParaRPr lang="en-US" sz="1200" dirty="0"/>
-          </a:p>
-          <a:p>
-            <a:pPr algn="l" marL="342900" indent="-342900">
-              <a:lnSpc>
-                <a:spcPts val="1620"/>
-              </a:lnSpc>
-              <a:spcAft>
-                <a:spcPts val="300"/>
-              </a:spcAft>
-              <a:buSzPct val="100000"/>
-              <a:buChar char="•"/>
-            </a:pPr>
-            <a:r>
-              <a:rPr lang="en-US" sz="1200" b="1" dirty="0">
-                <a:solidFill>
-                  <a:srgbClr val="1A1A1A"/>
-                </a:solidFill>
-                <a:latin typeface="Georgia" pitchFamily="34" charset="0"/>
-                <a:ea typeface="Georgia" pitchFamily="34" charset="-122"/>
-                <a:cs typeface="Georgia" pitchFamily="34" charset="-120"/>
-              </a:rPr>
-              <a:t>tanmātratvam</a:t>
-            </a:r>
-            <a:pPr algn="l" indent="0" marL="0">
-              <a:lnSpc>
-                <a:spcPts val="1620"/>
-              </a:lnSpc>
-              <a:spcAft>
-                <a:spcPts val="300"/>
-              </a:spcAft>
-              <a:buNone/>
-            </a:pPr>
-            <a:r>
-              <a:rPr lang="en-US" sz="1200" dirty="0">
-                <a:solidFill>
-                  <a:srgbClr val="1A1A1A"/>
-                </a:solidFill>
-                <a:latin typeface="Georgia" pitchFamily="34" charset="0"/>
-                <a:ea typeface="Georgia" pitchFamily="34" charset="-122"/>
-                <a:cs typeface="Georgia" pitchFamily="34" charset="-120"/>
-              </a:rPr>
-              <a:t> — the subtle-essence-ness</a:t>
-            </a:r>
-            <a:endParaRPr lang="en-US" sz="1200" dirty="0"/>
-          </a:p>
-          <a:p>
-            <a:pPr algn="l" marL="342900" indent="-342900">
-              <a:lnSpc>
-                <a:spcPts val="1620"/>
-              </a:lnSpc>
-              <a:spcAft>
-                <a:spcPts val="300"/>
-              </a:spcAft>
-              <a:buSzPct val="100000"/>
-              <a:buChar char="•"/>
-            </a:pPr>
-            <a:r>
-              <a:rPr lang="en-US" sz="1200" b="1" dirty="0">
-                <a:solidFill>
-                  <a:srgbClr val="1A1A1A"/>
-                </a:solidFill>
-                <a:latin typeface="Georgia" pitchFamily="34" charset="0"/>
-                <a:ea typeface="Georgia" pitchFamily="34" charset="-122"/>
-                <a:cs typeface="Georgia" pitchFamily="34" charset="-120"/>
-              </a:rPr>
-              <a:t>nabhasvataḥ</a:t>
-            </a:r>
-            <a:pPr algn="l" indent="0" marL="0">
-              <a:lnSpc>
-                <a:spcPts val="1620"/>
-              </a:lnSpc>
-              <a:spcAft>
-                <a:spcPts val="300"/>
-              </a:spcAft>
-              <a:buNone/>
-            </a:pPr>
-            <a:r>
-              <a:rPr lang="en-US" sz="1200" dirty="0">
-                <a:solidFill>
-                  <a:srgbClr val="1A1A1A"/>
-                </a:solidFill>
-                <a:latin typeface="Georgia" pitchFamily="34" charset="0"/>
-                <a:ea typeface="Georgia" pitchFamily="34" charset="-122"/>
-                <a:cs typeface="Georgia" pitchFamily="34" charset="-120"/>
-              </a:rPr>
-              <a:t> — of air / wind (genitive; nabhasvat = wind)</a:t>
-            </a:r>
-            <a:endParaRPr lang="en-US" sz="1200" dirty="0"/>
-          </a:p>
-        </p:txBody>
-      </p:sp>
-      <p:sp>
-        <p:nvSpPr>
-          <p:cNvPr id="9" name="Text 7"/>
-          <p:cNvSpPr/>
-          <p:nvPr/>
-        </p:nvSpPr>
-        <p:spPr>
-          <a:xfrm>
-            <a:off x="406301" y="5037832"/>
-            <a:ext cx="8498026" cy="213271"/>
-          </a:xfrm>
-          <a:prstGeom prst="rect">
-            <a:avLst/>
-          </a:prstGeom>
-          <a:noFill/>
-          <a:ln/>
-        </p:spPr>
-        <p:txBody>
-          <a:bodyPr wrap="square" lIns="0" tIns="0" rIns="0" bIns="0" rtlCol="0" anchor="t"/>
-          <a:lstStyle/>
-          <a:p>
-            <a:pPr algn="l" indent="0" marL="0">
-              <a:lnSpc>
-                <a:spcPts val="1680"/>
-              </a:lnSpc>
-              <a:spcBef>
-                <a:spcPts val="300"/>
-              </a:spcBef>
-              <a:spcAft>
-                <a:spcPts val="300"/>
-              </a:spcAft>
-              <a:buNone/>
-            </a:pPr>
-            <a:r>
-              <a:rPr lang="en-US" sz="1200" dirty="0">
-                <a:solidFill>
-                  <a:srgbClr val="1A1A1A"/>
-                </a:solidFill>
-                <a:latin typeface="Georgia" pitchFamily="34" charset="0"/>
-                <a:ea typeface="Georgia" pitchFamily="34" charset="-122"/>
-                <a:cs typeface="Georgia" pitchFamily="34" charset="-120"/>
-              </a:rPr>
-              <a:t>Continuous translation:    &gt; "Softness, hardness, cold and heat — these are the touch-ness of touch, the subtle essence of air."</a:t>
-            </a:r>
-            <a:endParaRPr lang="en-US" sz="1200" dirty="0"/>
-          </a:p>
-        </p:txBody>
-      </p:sp>
-      <p:sp>
-        <p:nvSpPr>
-          <p:cNvPr id="10" name="Text 8"/>
-          <p:cNvSpPr/>
-          <p:nvPr/>
-        </p:nvSpPr>
-        <p:spPr>
-          <a:xfrm>
-            <a:off x="634901" y="5339953"/>
-            <a:ext cx="8102798" cy="281880"/>
-          </a:xfrm>
-          <a:prstGeom prst="rect">
-            <a:avLst/>
-          </a:prstGeom>
-          <a:noFill/>
-          <a:ln/>
-        </p:spPr>
-        <p:txBody>
-          <a:bodyPr wrap="square" lIns="0" tIns="0" rIns="0" bIns="0" rtlCol="0" anchor="t"/>
-          <a:lstStyle/>
-          <a:p>
-            <a:pPr algn="l" marL="342900" indent="-342900">
-              <a:lnSpc>
-                <a:spcPts val="1620"/>
-              </a:lnSpc>
-              <a:spcAft>
-                <a:spcPts val="300"/>
-              </a:spcAft>
-              <a:buSzPct val="100000"/>
-              <a:buChar char="•"/>
-            </a:pPr>
-            <a:r>
-              <a:rPr lang="en-US" sz="1200" b="1" dirty="0">
-                <a:solidFill>
-                  <a:srgbClr val="1A1A1A"/>
-                </a:solidFill>
-                <a:latin typeface="Georgia" pitchFamily="34" charset="0"/>
-                <a:ea typeface="Georgia" pitchFamily="34" charset="-122"/>
-                <a:cs typeface="Georgia" pitchFamily="34" charset="-120"/>
-              </a:rPr>
-              <a:t>Class discussion (8 min):</a:t>
-            </a:r>
-            <a:endParaRPr lang="en-US" sz="1200" dirty="0"/>
-          </a:p>
-        </p:txBody>
-      </p:sp>
-      <p:sp>
-        <p:nvSpPr>
-          <p:cNvPr id="11" name="Text 9"/>
-          <p:cNvSpPr/>
-          <p:nvPr/>
-        </p:nvSpPr>
-        <p:spPr>
-          <a:xfrm>
-            <a:off x="406301" y="5710684"/>
-            <a:ext cx="8498026" cy="639812"/>
-          </a:xfrm>
-          <a:prstGeom prst="rect">
-            <a:avLst/>
-          </a:prstGeom>
-          <a:noFill/>
-          <a:ln/>
-        </p:spPr>
-        <p:txBody>
-          <a:bodyPr wrap="square" lIns="0" tIns="0" rIns="0" bIns="0" rtlCol="0" anchor="t"/>
-          <a:lstStyle/>
-          <a:p>
-            <a:pPr algn="l" indent="0" marL="0">
-              <a:lnSpc>
-                <a:spcPts val="1680"/>
-              </a:lnSpc>
-              <a:spcBef>
-                <a:spcPts val="300"/>
-              </a:spcBef>
-              <a:spcAft>
-                <a:spcPts val="300"/>
-              </a:spcAft>
-              <a:buNone/>
-            </a:pPr>
-            <a:r>
-              <a:rPr lang="en-US" sz="1200" dirty="0">
-                <a:solidFill>
-                  <a:srgbClr val="1A1A1A"/>
-                </a:solidFill>
-                <a:latin typeface="Georgia" pitchFamily="34" charset="0"/>
-                <a:ea typeface="Georgia" pitchFamily="34" charset="-122"/>
-                <a:cs typeface="Georgia" pitchFamily="34" charset="-120"/>
-              </a:rPr>
-              <a:t>– What surprises you about the categories included under "touch"? – Note the philosophical move: </a:t>
-            </a:r>
-            <a:pPr algn="l" indent="0" marL="0">
-              <a:lnSpc>
-                <a:spcPts val="1680"/>
-              </a:lnSpc>
-              <a:spcBef>
-                <a:spcPts val="300"/>
-              </a:spcBef>
-              <a:spcAft>
-                <a:spcPts val="300"/>
-              </a:spcAft>
-              <a:buNone/>
-            </a:pPr>
-            <a:r>
-              <a:rPr lang="en-US" sz="1200" i="1" dirty="0">
-                <a:solidFill>
-                  <a:srgbClr val="1A1A1A"/>
-                </a:solidFill>
-                <a:latin typeface="Georgia" pitchFamily="34" charset="0"/>
-                <a:ea typeface="Georgia" pitchFamily="34" charset="-122"/>
-                <a:cs typeface="Georgia" pitchFamily="34" charset="-120"/>
-              </a:rPr>
-              <a:t>sparśasya sparśatvam</a:t>
-            </a:r>
-            <a:pPr algn="l" indent="0" marL="0">
-              <a:lnSpc>
-                <a:spcPts val="1680"/>
-              </a:lnSpc>
-              <a:spcBef>
-                <a:spcPts val="300"/>
-              </a:spcBef>
-              <a:spcAft>
-                <a:spcPts val="300"/>
-              </a:spcAft>
-              <a:buNone/>
-            </a:pPr>
-            <a:r>
-              <a:rPr lang="en-US" sz="1200" dirty="0">
-                <a:solidFill>
-                  <a:srgbClr val="1A1A1A"/>
-                </a:solidFill>
-                <a:latin typeface="Georgia" pitchFamily="34" charset="0"/>
-                <a:ea typeface="Georgia" pitchFamily="34" charset="-122"/>
-                <a:cs typeface="Georgia" pitchFamily="34" charset="-120"/>
-              </a:rPr>
-              <a:t> (touch-ness of touch) — the verse identifies the defining property of a category by giving its essence a name. – How is this different from a modern dictionary definition of "touch"?</a:t>
-            </a:r>
-            <a:endParaRPr lang="en-US" sz="1200" dirty="0"/>
-          </a:p>
-        </p:txBody>
-      </p:sp>
-      <p:sp>
-        <p:nvSpPr>
-          <p:cNvPr id="12" name="Text 10"/>
-          <p:cNvSpPr/>
-          <p:nvPr/>
-        </p:nvSpPr>
-        <p:spPr>
-          <a:xfrm>
-            <a:off x="406301" y="6502896"/>
+            <a:off x="406301" y="4434929"/>
             <a:ext cx="8498026" cy="213271"/>
           </a:xfrm>
           <a:prstGeom prst="rect">
@@ -4110,7 +4460,7 @@
                 <a:ea typeface="Times New Roman" pitchFamily="34" charset="-122"/>
                 <a:cs typeface="Times New Roman" pitchFamily="34" charset="-120"/>
               </a:rPr>
-              <a:t>Formative quiz (15 min)</a:t>
+              <a:t>Reading (15 min)</a:t>
             </a:r>
             <a:endParaRPr lang="en-US" sz="1800" dirty="0"/>
           </a:p>
@@ -4125,7 +4475,7 @@
         <p:spPr>
           <a:xfrm>
             <a:off x="634901" y="883593"/>
-            <a:ext cx="8102798" cy="300930"/>
+            <a:ext cx="8102798" cy="281880"/>
           </a:xfrm>
           <a:prstGeom prst="rect">
             <a:avLst/>
@@ -4148,6 +4498,26 @@
               <a:buChar char="•"/>
             </a:pPr>
             <a:r>
+              <a:rPr lang="en-US" sz="1200" b="1" dirty="0">
+                <a:solidFill>
+                  <a:srgbClr val="1A1A1A"/>
+                </a:solidFill>
+                <a:latin typeface="Georgia" pitchFamily="34" charset="0"/>
+                <a:ea typeface="Georgia" pitchFamily="34" charset="-122"/>
+                <a:cs typeface="Georgia" pitchFamily="34" charset="-120"/>
+              </a:rPr>
+              <a:t>First read — sound.</a:t>
+            </a:r>
+            <a:pPr algn="l" indent="0" marL="0">
+              <a:lnSpc>
+                <a:spcPts val="1620"/>
+              </a:lnSpc>
+              <a:spcAft>
+                <a:spcPts val="300"/>
+              </a:spcAft>
+              <a:buNone/>
+            </a:pPr>
+            <a:r>
               <a:rPr lang="en-US" sz="1200" dirty="0">
                 <a:solidFill>
                   <a:srgbClr val="1A1A1A"/>
@@ -4156,15 +4526,208 @@
                 <a:ea typeface="Georgia" pitchFamily="34" charset="-122"/>
                 <a:cs typeface="Georgia" pitchFamily="34" charset="-120"/>
               </a:rPr>
-              <a:t>quizzes/formative.md</a:t>
-            </a:r>
+              <a:t> Teacher reads the IAST aloud once. Students listen.</a:t>
+            </a:r>
+            <a:endParaRPr lang="en-US" sz="1200" dirty="0"/>
+          </a:p>
+        </p:txBody>
+      </p:sp>
+      <p:sp>
+        <p:nvSpPr>
+          <p:cNvPr id="5" name="Text 3"/>
+          <p:cNvSpPr/>
+          <p:nvPr/>
+        </p:nvSpPr>
+        <p:spPr>
+          <a:xfrm>
+            <a:off x="406301" y="1266974"/>
+            <a:ext cx="8331398" cy="611981"/>
+          </a:xfrm>
+          <a:prstGeom prst="rect">
+            <a:avLst/>
+          </a:prstGeom>
+          <a:solidFill>
+            <a:srgbClr val="FFFFFF"/>
+          </a:solidFill>
+          <a:ln/>
+        </p:spPr>
+        <p:txBody>
+          <a:bodyPr wrap="square" rtlCol="0" anchor="ctr"/>
+          <a:lstStyle/>
+          <a:p>
+            <a:pPr indent="0" marL="0">
+              <a:buNone/>
+            </a:pPr>
+            <a:endParaRPr lang="en-US" dirty="0"/>
+          </a:p>
+        </p:txBody>
+      </p:sp>
+      <p:sp>
+        <p:nvSpPr>
+          <p:cNvPr id="6" name="Shape 4"/>
+          <p:cNvSpPr/>
+          <p:nvPr/>
+        </p:nvSpPr>
+        <p:spPr>
+          <a:xfrm>
+            <a:off x="434876" y="1266974"/>
+            <a:ext cx="0" cy="611981"/>
+          </a:xfrm>
+          <a:prstGeom prst="line">
+            <a:avLst/>
+          </a:prstGeom>
+          <a:noFill/>
+          <a:ln w="57150">
+            <a:solidFill>
+              <a:srgbClr val="997929"/>
+            </a:solidFill>
+            <a:prstDash val="solid"/>
+          </a:ln>
+        </p:spPr>
+      </p:sp>
+      <p:sp>
+        <p:nvSpPr>
+          <p:cNvPr id="7" name="Text 5"/>
+          <p:cNvSpPr/>
+          <p:nvPr/>
+        </p:nvSpPr>
+        <p:spPr>
+          <a:xfrm>
+            <a:off x="692051" y="1457474"/>
+            <a:ext cx="7973389" cy="230981"/>
+          </a:xfrm>
+          <a:prstGeom prst="rect">
+            <a:avLst/>
+          </a:prstGeom>
+          <a:noFill/>
+          <a:ln/>
+        </p:spPr>
+        <p:txBody>
+          <a:bodyPr wrap="square" lIns="0" tIns="0" rIns="0" bIns="0" rtlCol="0" anchor="t"/>
+          <a:lstStyle/>
+          <a:p>
             <a:pPr algn="l" indent="0" marL="0">
               <a:lnSpc>
+                <a:spcPts val="1820"/>
+              </a:lnSpc>
+              <a:spcBef>
+                <a:spcPts val="300"/>
+              </a:spcBef>
+              <a:spcAft>
+                <a:spcPts val="300"/>
+              </a:spcAft>
+              <a:buNone/>
+            </a:pPr>
+            <a:r>
+              <a:rPr lang="en-US" sz="1300" i="1" dirty="0">
+                <a:solidFill>
+                  <a:srgbClr val="1A1A1A"/>
+                </a:solidFill>
+                <a:latin typeface="Times New Roman" pitchFamily="34" charset="0"/>
+                <a:ea typeface="Times New Roman" pitchFamily="34" charset="-122"/>
+                <a:cs typeface="Times New Roman" pitchFamily="34" charset="-120"/>
+              </a:rPr>
+              <a:t>mṛdutvaṁ kaṭhinatvaṁ ca śaityam uṣṇatvam eva ca</a:t>
+            </a:r>
+            <a:pPr algn="l" indent="0" marL="0">
+              <a:lnSpc>
+                <a:spcPts val="1820"/>
+              </a:lnSpc>
+              <a:spcBef>
+                <a:spcPts val="300"/>
+              </a:spcBef>
+              <a:spcAft>
+                <a:spcPts val="300"/>
+              </a:spcAft>
+              <a:buNone/>
+            </a:pPr>
+            <a:r>
+              <a:rPr lang="en-US" sz="1300" dirty="0">
+                <a:solidFill>
+                  <a:srgbClr val="1A1A1A"/>
+                </a:solidFill>
+                <a:latin typeface="Times New Roman" pitchFamily="34" charset="0"/>
+                <a:ea typeface="Times New Roman" pitchFamily="34" charset="-122"/>
+                <a:cs typeface="Times New Roman" pitchFamily="34" charset="-120"/>
+              </a:rPr>
+              <a:t> </a:t>
+            </a:r>
+            <a:pPr algn="l" indent="0" marL="0">
+              <a:lnSpc>
+                <a:spcPts val="1820"/>
+              </a:lnSpc>
+              <a:spcBef>
+                <a:spcPts val="300"/>
+              </a:spcBef>
+              <a:spcAft>
+                <a:spcPts val="300"/>
+              </a:spcAft>
+              <a:buNone/>
+            </a:pPr>
+            <a:r>
+              <a:rPr lang="en-US" sz="1300" i="1" dirty="0">
+                <a:solidFill>
+                  <a:srgbClr val="1A1A1A"/>
+                </a:solidFill>
+                <a:latin typeface="Times New Roman" pitchFamily="34" charset="0"/>
+                <a:ea typeface="Times New Roman" pitchFamily="34" charset="-122"/>
+                <a:cs typeface="Times New Roman" pitchFamily="34" charset="-120"/>
+              </a:rPr>
+              <a:t>etat sparśasya sparśatvaṁ tanmātratvaṁ nabhasvataḥ</a:t>
+            </a:r>
+            <a:endParaRPr lang="en-US" sz="1300" dirty="0"/>
+          </a:p>
+        </p:txBody>
+      </p:sp>
+      <p:sp>
+        <p:nvSpPr>
+          <p:cNvPr id="8" name="Text 6"/>
+          <p:cNvSpPr/>
+          <p:nvPr/>
+        </p:nvSpPr>
+        <p:spPr>
+          <a:xfrm>
+            <a:off x="634901" y="1980456"/>
+            <a:ext cx="8102798" cy="281880"/>
+          </a:xfrm>
+          <a:prstGeom prst="rect">
+            <a:avLst/>
+          </a:prstGeom>
+          <a:noFill/>
+          <a:ln/>
+        </p:spPr>
+        <p:txBody>
+          <a:bodyPr wrap="square" lIns="0" tIns="0" rIns="0" bIns="0" rtlCol="0" anchor="t"/>
+          <a:lstStyle/>
+          <a:p>
+            <a:pPr algn="l" marL="342900" indent="-342900">
+              <a:lnSpc>
                 <a:spcPts val="1620"/>
               </a:lnSpc>
               <a:spcAft>
                 <a:spcPts val="300"/>
               </a:spcAft>
+              <a:buSzPct val="100000"/>
+              <a:buChar char="•"/>
+            </a:pPr>
+            <a:r>
+              <a:rPr lang="en-US" sz="1200" b="1" dirty="0">
+                <a:solidFill>
+                  <a:srgbClr val="1A1A1A"/>
+                </a:solidFill>
+                <a:latin typeface="Georgia" pitchFamily="34" charset="0"/>
+                <a:ea typeface="Georgia" pitchFamily="34" charset="-122"/>
+                <a:cs typeface="Georgia" pitchFamily="34" charset="-120"/>
+              </a:rPr>
+              <a:t>Second read — meaning.</a:t>
+            </a:r>
+            <a:pPr algn="l" indent="0" marL="0">
+              <a:lnSpc>
+                <a:spcPts val="1620"/>
+              </a:lnSpc>
+              <a:spcAft>
+                <a:spcPts val="300"/>
+              </a:spcAft>
               <a:buNone/>
             </a:pPr>
             <a:r>
@@ -4176,7 +4739,7 @@
                 <a:ea typeface="Georgia" pitchFamily="34" charset="-122"/>
                 <a:cs typeface="Georgia" pitchFamily="34" charset="-120"/>
               </a:rPr>
-              <a:t> Part B.</a:t>
+              <a:t> Students follow the word-by-word gloss:</a:t>
             </a:r>
             <a:endParaRPr lang="en-US" sz="1200" dirty="0"/>
           </a:p>
@@ -4184,7 +4747,55 @@
       </p:sp>
       <p:sp>
         <p:nvSpPr>
-          <p:cNvPr id="5" name="Text 3"/>
+          <p:cNvPr id="9" name="Text 7"/>
+          <p:cNvSpPr/>
+          <p:nvPr/>
+        </p:nvSpPr>
+        <p:spPr>
+          <a:xfrm>
+            <a:off x="406301" y="2351187"/>
+            <a:ext cx="8498026" cy="213271"/>
+          </a:xfrm>
+          <a:prstGeom prst="rect">
+            <a:avLst/>
+          </a:prstGeom>
+          <a:noFill/>
+          <a:ln/>
+        </p:spPr>
+        <p:txBody>
+          <a:bodyPr wrap="square" lIns="0" tIns="0" rIns="0" bIns="0" rtlCol="0" anchor="t"/>
+          <a:lstStyle/>
+          <a:p>
+            <a:pPr algn="l" indent="0" marL="0">
+              <a:lnSpc>
+                <a:spcPts val="1680"/>
+              </a:lnSpc>
+              <a:spcBef>
+                <a:spcPts val="300"/>
+              </a:spcBef>
+              <a:spcAft>
+                <a:spcPts val="300"/>
+              </a:spcAft>
+              <a:buNone/>
+            </a:pPr>
+            <a:r>
+              <a:rPr lang="en-US" sz="1200" i="1" dirty="0">
+                <a:solidFill>
+                  <a:srgbClr val="1A1A1A"/>
+                </a:solidFill>
+                <a:latin typeface="Georgia" pitchFamily="34" charset="0"/>
+                <a:ea typeface="Georgia" pitchFamily="34" charset="-122"/>
+                <a:cs typeface="Georgia" pitchFamily="34" charset="-120"/>
+              </a:rPr>
+              <a:t>Each row: Sanskrit · Gloss.</a:t>
+            </a:r>
+            <a:endParaRPr lang="en-US" sz="1200" dirty="0"/>
+          </a:p>
+        </p:txBody>
+      </p:sp>
+      <p:sp>
+        <p:nvSpPr>
+          <p:cNvPr id="10" name="Text 8"/>
           <p:cNvSpPr/>
           <p:nvPr/>
         </p:nvSpPr>
@@ -4334,7 +4945,7 @@
                 <a:ea typeface="Times New Roman" pitchFamily="34" charset="-122"/>
                 <a:cs typeface="Times New Roman" pitchFamily="34" charset="-120"/>
               </a:rPr>
-              <a:t>Wrap-up (5 min)</a:t>
+              <a:t>Reading (15 min) (cont.)</a:t>
             </a:r>
             <a:endParaRPr lang="en-US" sz="1800" dirty="0"/>
           </a:p>
@@ -4348,8 +4959,8 @@
         </p:nvSpPr>
         <p:spPr>
           <a:xfrm>
-            <a:off x="406301" y="870942"/>
-            <a:ext cx="8498026" cy="213271"/>
+            <a:off x="634901" y="883593"/>
+            <a:ext cx="8102798" cy="2719685"/>
           </a:xfrm>
           <a:prstGeom prst="rect">
             <a:avLst/>
@@ -4361,13 +4972,31 @@
           <a:bodyPr wrap="square" lIns="0" tIns="0" rIns="0" bIns="0" rtlCol="0" anchor="t"/>
           <a:lstStyle/>
           <a:p>
+            <a:pPr algn="l" marL="342900" indent="-342900">
+              <a:lnSpc>
+                <a:spcPts val="1620"/>
+              </a:lnSpc>
+              <a:spcAft>
+                <a:spcPts val="300"/>
+              </a:spcAft>
+              <a:buSzPct val="100000"/>
+              <a:buChar char="•"/>
+            </a:pPr>
+            <a:r>
+              <a:rPr lang="en-US" sz="1200" b="1" dirty="0">
+                <a:solidFill>
+                  <a:srgbClr val="1A1A1A"/>
+                </a:solidFill>
+                <a:latin typeface="Georgia" pitchFamily="34" charset="0"/>
+                <a:ea typeface="Georgia" pitchFamily="34" charset="-122"/>
+                <a:cs typeface="Georgia" pitchFamily="34" charset="-120"/>
+              </a:rPr>
+              <a:t>mṛdutvam</a:t>
+            </a:r>
             <a:pPr algn="l" indent="0" marL="0">
               <a:lnSpc>
-                <a:spcPts val="1680"/>
-              </a:lnSpc>
-              <a:spcBef>
-                <a:spcPts val="300"/>
-              </a:spcBef>
+                <a:spcPts val="1620"/>
+              </a:lnSpc>
               <a:spcAft>
                 <a:spcPts val="300"/>
               </a:spcAft>
@@ -4382,30 +5011,447 @@
                 <a:ea typeface="Georgia" pitchFamily="34" charset="-122"/>
                 <a:cs typeface="Georgia" pitchFamily="34" charset="-120"/>
               </a:rPr>
-              <a:t>– Preview Day 6: </a:t>
+              <a:t> — softness (nominative neuter)</a:t>
+            </a:r>
+            <a:endParaRPr lang="en-US" sz="1200" dirty="0"/>
+          </a:p>
+          <a:p>
+            <a:pPr algn="l" marL="342900" indent="-342900">
+              <a:lnSpc>
+                <a:spcPts val="1620"/>
+              </a:lnSpc>
+              <a:spcAft>
+                <a:spcPts val="300"/>
+              </a:spcAft>
+              <a:buSzPct val="100000"/>
+              <a:buChar char="•"/>
+            </a:pPr>
+            <a:r>
+              <a:rPr lang="en-US" sz="1200" b="1" dirty="0">
+                <a:solidFill>
+                  <a:srgbClr val="1A1A1A"/>
+                </a:solidFill>
+                <a:latin typeface="Georgia" pitchFamily="34" charset="0"/>
+                <a:ea typeface="Georgia" pitchFamily="34" charset="-122"/>
+                <a:cs typeface="Georgia" pitchFamily="34" charset="-120"/>
+              </a:rPr>
+              <a:t>kaṭhinatvam</a:t>
             </a:r>
             <a:pPr algn="l" indent="0" marL="0">
               <a:lnSpc>
-                <a:spcPts val="1680"/>
-              </a:lnSpc>
-              <a:spcBef>
-                <a:spcPts val="300"/>
-              </a:spcBef>
-              <a:spcAft>
-                <a:spcPts val="300"/>
-              </a:spcAft>
-              <a:buNone/>
-            </a:pPr>
-            <a:r>
-              <a:rPr lang="en-US" sz="1200" i="1" dirty="0">
-                <a:solidFill>
-                  <a:srgbClr val="1A1A1A"/>
-                </a:solidFill>
-                <a:latin typeface="Georgia" pitchFamily="34" charset="0"/>
-                <a:ea typeface="Georgia" pitchFamily="34" charset="-122"/>
-                <a:cs typeface="Georgia" pitchFamily="34" charset="-120"/>
-              </a:rPr>
-              <a:t>"Tomorrow — the modern lens. What modern science adds, and what it explicitly drops."</a:t>
+                <a:spcPts val="1620"/>
+              </a:lnSpc>
+              <a:spcAft>
+                <a:spcPts val="300"/>
+              </a:spcAft>
+              <a:buNone/>
+            </a:pPr>
+            <a:r>
+              <a:rPr lang="en-US" sz="1200" dirty="0">
+                <a:solidFill>
+                  <a:srgbClr val="1A1A1A"/>
+                </a:solidFill>
+                <a:latin typeface="Georgia" pitchFamily="34" charset="0"/>
+                <a:ea typeface="Georgia" pitchFamily="34" charset="-122"/>
+                <a:cs typeface="Georgia" pitchFamily="34" charset="-120"/>
+              </a:rPr>
+              <a:t> — hardness</a:t>
+            </a:r>
+            <a:endParaRPr lang="en-US" sz="1200" dirty="0"/>
+          </a:p>
+          <a:p>
+            <a:pPr algn="l" marL="342900" indent="-342900">
+              <a:lnSpc>
+                <a:spcPts val="1620"/>
+              </a:lnSpc>
+              <a:spcAft>
+                <a:spcPts val="300"/>
+              </a:spcAft>
+              <a:buSzPct val="100000"/>
+              <a:buChar char="•"/>
+            </a:pPr>
+            <a:r>
+              <a:rPr lang="en-US" sz="1200" b="1" dirty="0">
+                <a:solidFill>
+                  <a:srgbClr val="1A1A1A"/>
+                </a:solidFill>
+                <a:latin typeface="Georgia" pitchFamily="34" charset="0"/>
+                <a:ea typeface="Georgia" pitchFamily="34" charset="-122"/>
+                <a:cs typeface="Georgia" pitchFamily="34" charset="-120"/>
+              </a:rPr>
+              <a:t>ca</a:t>
+            </a:r>
+            <a:pPr algn="l" indent="0" marL="0">
+              <a:lnSpc>
+                <a:spcPts val="1620"/>
+              </a:lnSpc>
+              <a:spcAft>
+                <a:spcPts val="300"/>
+              </a:spcAft>
+              <a:buNone/>
+            </a:pPr>
+            <a:r>
+              <a:rPr lang="en-US" sz="1200" dirty="0">
+                <a:solidFill>
+                  <a:srgbClr val="1A1A1A"/>
+                </a:solidFill>
+                <a:latin typeface="Georgia" pitchFamily="34" charset="0"/>
+                <a:ea typeface="Georgia" pitchFamily="34" charset="-122"/>
+                <a:cs typeface="Georgia" pitchFamily="34" charset="-120"/>
+              </a:rPr>
+              <a:t> — and</a:t>
+            </a:r>
+            <a:endParaRPr lang="en-US" sz="1200" dirty="0"/>
+          </a:p>
+          <a:p>
+            <a:pPr algn="l" marL="342900" indent="-342900">
+              <a:lnSpc>
+                <a:spcPts val="1620"/>
+              </a:lnSpc>
+              <a:spcAft>
+                <a:spcPts val="300"/>
+              </a:spcAft>
+              <a:buSzPct val="100000"/>
+              <a:buChar char="•"/>
+            </a:pPr>
+            <a:r>
+              <a:rPr lang="en-US" sz="1200" b="1" dirty="0">
+                <a:solidFill>
+                  <a:srgbClr val="1A1A1A"/>
+                </a:solidFill>
+                <a:latin typeface="Georgia" pitchFamily="34" charset="0"/>
+                <a:ea typeface="Georgia" pitchFamily="34" charset="-122"/>
+                <a:cs typeface="Georgia" pitchFamily="34" charset="-120"/>
+              </a:rPr>
+              <a:t>śaityam</a:t>
+            </a:r>
+            <a:pPr algn="l" indent="0" marL="0">
+              <a:lnSpc>
+                <a:spcPts val="1620"/>
+              </a:lnSpc>
+              <a:spcAft>
+                <a:spcPts val="300"/>
+              </a:spcAft>
+              <a:buNone/>
+            </a:pPr>
+            <a:r>
+              <a:rPr lang="en-US" sz="1200" dirty="0">
+                <a:solidFill>
+                  <a:srgbClr val="1A1A1A"/>
+                </a:solidFill>
+                <a:latin typeface="Georgia" pitchFamily="34" charset="0"/>
+                <a:ea typeface="Georgia" pitchFamily="34" charset="-122"/>
+                <a:cs typeface="Georgia" pitchFamily="34" charset="-120"/>
+              </a:rPr>
+              <a:t> — cold</a:t>
+            </a:r>
+            <a:endParaRPr lang="en-US" sz="1200" dirty="0"/>
+          </a:p>
+          <a:p>
+            <a:pPr algn="l" marL="342900" indent="-342900">
+              <a:lnSpc>
+                <a:spcPts val="1620"/>
+              </a:lnSpc>
+              <a:spcAft>
+                <a:spcPts val="300"/>
+              </a:spcAft>
+              <a:buSzPct val="100000"/>
+              <a:buChar char="•"/>
+            </a:pPr>
+            <a:r>
+              <a:rPr lang="en-US" sz="1200" b="1" dirty="0">
+                <a:solidFill>
+                  <a:srgbClr val="1A1A1A"/>
+                </a:solidFill>
+                <a:latin typeface="Georgia" pitchFamily="34" charset="0"/>
+                <a:ea typeface="Georgia" pitchFamily="34" charset="-122"/>
+                <a:cs typeface="Georgia" pitchFamily="34" charset="-120"/>
+              </a:rPr>
+              <a:t>uṣṇatvam</a:t>
+            </a:r>
+            <a:pPr algn="l" indent="0" marL="0">
+              <a:lnSpc>
+                <a:spcPts val="1620"/>
+              </a:lnSpc>
+              <a:spcAft>
+                <a:spcPts val="300"/>
+              </a:spcAft>
+              <a:buNone/>
+            </a:pPr>
+            <a:r>
+              <a:rPr lang="en-US" sz="1200" dirty="0">
+                <a:solidFill>
+                  <a:srgbClr val="1A1A1A"/>
+                </a:solidFill>
+                <a:latin typeface="Georgia" pitchFamily="34" charset="0"/>
+                <a:ea typeface="Georgia" pitchFamily="34" charset="-122"/>
+                <a:cs typeface="Georgia" pitchFamily="34" charset="-120"/>
+              </a:rPr>
+              <a:t> — heat</a:t>
+            </a:r>
+            <a:endParaRPr lang="en-US" sz="1200" dirty="0"/>
+          </a:p>
+          <a:p>
+            <a:pPr algn="l" marL="342900" indent="-342900">
+              <a:lnSpc>
+                <a:spcPts val="1620"/>
+              </a:lnSpc>
+              <a:spcAft>
+                <a:spcPts val="300"/>
+              </a:spcAft>
+              <a:buSzPct val="100000"/>
+              <a:buChar char="•"/>
+            </a:pPr>
+            <a:r>
+              <a:rPr lang="en-US" sz="1200" b="1" dirty="0">
+                <a:solidFill>
+                  <a:srgbClr val="1A1A1A"/>
+                </a:solidFill>
+                <a:latin typeface="Georgia" pitchFamily="34" charset="0"/>
+                <a:ea typeface="Georgia" pitchFamily="34" charset="-122"/>
+                <a:cs typeface="Georgia" pitchFamily="34" charset="-120"/>
+              </a:rPr>
+              <a:t>eva ca</a:t>
+            </a:r>
+            <a:pPr algn="l" indent="0" marL="0">
+              <a:lnSpc>
+                <a:spcPts val="1620"/>
+              </a:lnSpc>
+              <a:spcAft>
+                <a:spcPts val="300"/>
+              </a:spcAft>
+              <a:buNone/>
+            </a:pPr>
+            <a:r>
+              <a:rPr lang="en-US" sz="1200" dirty="0">
+                <a:solidFill>
+                  <a:srgbClr val="1A1A1A"/>
+                </a:solidFill>
+                <a:latin typeface="Georgia" pitchFamily="34" charset="0"/>
+                <a:ea typeface="Georgia" pitchFamily="34" charset="-122"/>
+                <a:cs typeface="Georgia" pitchFamily="34" charset="-120"/>
+              </a:rPr>
+              <a:t> — as well</a:t>
+            </a:r>
+            <a:endParaRPr lang="en-US" sz="1200" dirty="0"/>
+          </a:p>
+          <a:p>
+            <a:pPr algn="l" marL="342900" indent="-342900">
+              <a:lnSpc>
+                <a:spcPts val="1620"/>
+              </a:lnSpc>
+              <a:spcAft>
+                <a:spcPts val="300"/>
+              </a:spcAft>
+              <a:buSzPct val="100000"/>
+              <a:buChar char="•"/>
+            </a:pPr>
+            <a:r>
+              <a:rPr lang="en-US" sz="1200" b="1" dirty="0">
+                <a:solidFill>
+                  <a:srgbClr val="1A1A1A"/>
+                </a:solidFill>
+                <a:latin typeface="Georgia" pitchFamily="34" charset="0"/>
+                <a:ea typeface="Georgia" pitchFamily="34" charset="-122"/>
+                <a:cs typeface="Georgia" pitchFamily="34" charset="-120"/>
+              </a:rPr>
+              <a:t>etat</a:t>
+            </a:r>
+            <a:pPr algn="l" indent="0" marL="0">
+              <a:lnSpc>
+                <a:spcPts val="1620"/>
+              </a:lnSpc>
+              <a:spcAft>
+                <a:spcPts val="300"/>
+              </a:spcAft>
+              <a:buNone/>
+            </a:pPr>
+            <a:r>
+              <a:rPr lang="en-US" sz="1200" dirty="0">
+                <a:solidFill>
+                  <a:srgbClr val="1A1A1A"/>
+                </a:solidFill>
+                <a:latin typeface="Georgia" pitchFamily="34" charset="0"/>
+                <a:ea typeface="Georgia" pitchFamily="34" charset="-122"/>
+                <a:cs typeface="Georgia" pitchFamily="34" charset="-120"/>
+              </a:rPr>
+              <a:t> — these</a:t>
+            </a:r>
+            <a:endParaRPr lang="en-US" sz="1200" dirty="0"/>
+          </a:p>
+          <a:p>
+            <a:pPr algn="l" marL="342900" indent="-342900">
+              <a:lnSpc>
+                <a:spcPts val="1620"/>
+              </a:lnSpc>
+              <a:spcAft>
+                <a:spcPts val="300"/>
+              </a:spcAft>
+              <a:buSzPct val="100000"/>
+              <a:buChar char="•"/>
+            </a:pPr>
+            <a:r>
+              <a:rPr lang="en-US" sz="1200" b="1" dirty="0">
+                <a:solidFill>
+                  <a:srgbClr val="1A1A1A"/>
+                </a:solidFill>
+                <a:latin typeface="Georgia" pitchFamily="34" charset="0"/>
+                <a:ea typeface="Georgia" pitchFamily="34" charset="-122"/>
+                <a:cs typeface="Georgia" pitchFamily="34" charset="-120"/>
+              </a:rPr>
+              <a:t>sparśasya</a:t>
+            </a:r>
+            <a:pPr algn="l" indent="0" marL="0">
+              <a:lnSpc>
+                <a:spcPts val="1620"/>
+              </a:lnSpc>
+              <a:spcAft>
+                <a:spcPts val="300"/>
+              </a:spcAft>
+              <a:buNone/>
+            </a:pPr>
+            <a:r>
+              <a:rPr lang="en-US" sz="1200" dirty="0">
+                <a:solidFill>
+                  <a:srgbClr val="1A1A1A"/>
+                </a:solidFill>
+                <a:latin typeface="Georgia" pitchFamily="34" charset="0"/>
+                <a:ea typeface="Georgia" pitchFamily="34" charset="-122"/>
+                <a:cs typeface="Georgia" pitchFamily="34" charset="-120"/>
+              </a:rPr>
+              <a:t> — of touch (genitive)</a:t>
+            </a:r>
+            <a:endParaRPr lang="en-US" sz="1200" dirty="0"/>
+          </a:p>
+          <a:p>
+            <a:pPr algn="l" marL="342900" indent="-342900">
+              <a:lnSpc>
+                <a:spcPts val="1620"/>
+              </a:lnSpc>
+              <a:spcAft>
+                <a:spcPts val="300"/>
+              </a:spcAft>
+              <a:buSzPct val="100000"/>
+              <a:buChar char="•"/>
+            </a:pPr>
+            <a:r>
+              <a:rPr lang="en-US" sz="1200" b="1" dirty="0">
+                <a:solidFill>
+                  <a:srgbClr val="1A1A1A"/>
+                </a:solidFill>
+                <a:latin typeface="Georgia" pitchFamily="34" charset="0"/>
+                <a:ea typeface="Georgia" pitchFamily="34" charset="-122"/>
+                <a:cs typeface="Georgia" pitchFamily="34" charset="-120"/>
+              </a:rPr>
+              <a:t>sparśatvam</a:t>
+            </a:r>
+            <a:pPr algn="l" indent="0" marL="0">
+              <a:lnSpc>
+                <a:spcPts val="1620"/>
+              </a:lnSpc>
+              <a:spcAft>
+                <a:spcPts val="300"/>
+              </a:spcAft>
+              <a:buNone/>
+            </a:pPr>
+            <a:r>
+              <a:rPr lang="en-US" sz="1200" dirty="0">
+                <a:solidFill>
+                  <a:srgbClr val="1A1A1A"/>
+                </a:solidFill>
+                <a:latin typeface="Georgia" pitchFamily="34" charset="0"/>
+                <a:ea typeface="Georgia" pitchFamily="34" charset="-122"/>
+                <a:cs typeface="Georgia" pitchFamily="34" charset="-120"/>
+              </a:rPr>
+              <a:t> — the touch-ness (= the defining quality of touch)</a:t>
+            </a:r>
+            <a:endParaRPr lang="en-US" sz="1200" dirty="0"/>
+          </a:p>
+          <a:p>
+            <a:pPr algn="l" marL="342900" indent="-342900">
+              <a:lnSpc>
+                <a:spcPts val="1620"/>
+              </a:lnSpc>
+              <a:spcAft>
+                <a:spcPts val="300"/>
+              </a:spcAft>
+              <a:buSzPct val="100000"/>
+              <a:buChar char="•"/>
+            </a:pPr>
+            <a:r>
+              <a:rPr lang="en-US" sz="1200" b="1" dirty="0">
+                <a:solidFill>
+                  <a:srgbClr val="1A1A1A"/>
+                </a:solidFill>
+                <a:latin typeface="Georgia" pitchFamily="34" charset="0"/>
+                <a:ea typeface="Georgia" pitchFamily="34" charset="-122"/>
+                <a:cs typeface="Georgia" pitchFamily="34" charset="-120"/>
+              </a:rPr>
+              <a:t>tanmātratvam</a:t>
+            </a:r>
+            <a:pPr algn="l" indent="0" marL="0">
+              <a:lnSpc>
+                <a:spcPts val="1620"/>
+              </a:lnSpc>
+              <a:spcAft>
+                <a:spcPts val="300"/>
+              </a:spcAft>
+              <a:buNone/>
+            </a:pPr>
+            <a:r>
+              <a:rPr lang="en-US" sz="1200" dirty="0">
+                <a:solidFill>
+                  <a:srgbClr val="1A1A1A"/>
+                </a:solidFill>
+                <a:latin typeface="Georgia" pitchFamily="34" charset="0"/>
+                <a:ea typeface="Georgia" pitchFamily="34" charset="-122"/>
+                <a:cs typeface="Georgia" pitchFamily="34" charset="-120"/>
+              </a:rPr>
+              <a:t> — the subtle-essence-ness</a:t>
+            </a:r>
+            <a:endParaRPr lang="en-US" sz="1200" dirty="0"/>
+          </a:p>
+          <a:p>
+            <a:pPr algn="l" marL="342900" indent="-342900">
+              <a:lnSpc>
+                <a:spcPts val="1620"/>
+              </a:lnSpc>
+              <a:spcAft>
+                <a:spcPts val="300"/>
+              </a:spcAft>
+              <a:buSzPct val="100000"/>
+              <a:buChar char="•"/>
+            </a:pPr>
+            <a:r>
+              <a:rPr lang="en-US" sz="1200" b="1" dirty="0">
+                <a:solidFill>
+                  <a:srgbClr val="1A1A1A"/>
+                </a:solidFill>
+                <a:latin typeface="Georgia" pitchFamily="34" charset="0"/>
+                <a:ea typeface="Georgia" pitchFamily="34" charset="-122"/>
+                <a:cs typeface="Georgia" pitchFamily="34" charset="-120"/>
+              </a:rPr>
+              <a:t>nabhasvataḥ</a:t>
+            </a:r>
+            <a:pPr algn="l" indent="0" marL="0">
+              <a:lnSpc>
+                <a:spcPts val="1620"/>
+              </a:lnSpc>
+              <a:spcAft>
+                <a:spcPts val="300"/>
+              </a:spcAft>
+              <a:buNone/>
+            </a:pPr>
+            <a:r>
+              <a:rPr lang="en-US" sz="1200" dirty="0">
+                <a:solidFill>
+                  <a:srgbClr val="1A1A1A"/>
+                </a:solidFill>
+                <a:latin typeface="Georgia" pitchFamily="34" charset="0"/>
+                <a:ea typeface="Georgia" pitchFamily="34" charset="-122"/>
+                <a:cs typeface="Georgia" pitchFamily="34" charset="-120"/>
+              </a:rPr>
+              <a:t> — of air / wind (genitive; nabhasvat = wind)</a:t>
             </a:r>
             <a:endParaRPr lang="en-US" sz="1200" dirty="0"/>
           </a:p>
@@ -4563,7 +5609,7 @@
                 <a:ea typeface="Times New Roman" pitchFamily="34" charset="-122"/>
                 <a:cs typeface="Times New Roman" pitchFamily="34" charset="-120"/>
               </a:rPr>
-              <a:t>Differentiation</a:t>
+              <a:t>Reading (15 min) (cont.)</a:t>
             </a:r>
             <a:endParaRPr lang="en-US" sz="1800" dirty="0"/>
           </a:p>
@@ -4577,8 +5623,8 @@
         </p:nvSpPr>
         <p:spPr>
           <a:xfrm>
-            <a:off x="634901" y="883593"/>
-            <a:ext cx="8102798" cy="525661"/>
+            <a:off x="406301" y="870942"/>
+            <a:ext cx="8498026" cy="213271"/>
           </a:xfrm>
           <a:prstGeom prst="rect">
             <a:avLst/>
@@ -4590,31 +5636,13 @@
           <a:bodyPr wrap="square" lIns="0" tIns="0" rIns="0" bIns="0" rtlCol="0" anchor="t"/>
           <a:lstStyle/>
           <a:p>
-            <a:pPr algn="l" marL="342900" indent="-342900">
-              <a:lnSpc>
-                <a:spcPts val="1620"/>
-              </a:lnSpc>
-              <a:spcAft>
-                <a:spcPts val="300"/>
-              </a:spcAft>
-              <a:buSzPct val="100000"/>
-              <a:buChar char="•"/>
-            </a:pPr>
-            <a:r>
-              <a:rPr lang="en-US" sz="1200" b="1" dirty="0">
-                <a:solidFill>
-                  <a:srgbClr val="1A1A1A"/>
-                </a:solidFill>
-                <a:latin typeface="Georgia" pitchFamily="34" charset="0"/>
-                <a:ea typeface="Georgia" pitchFamily="34" charset="-122"/>
-                <a:cs typeface="Georgia" pitchFamily="34" charset="-120"/>
-              </a:rPr>
-              <a:t>Tier up:</a:t>
-            </a:r>
             <a:pPr algn="l" indent="0" marL="0">
               <a:lnSpc>
-                <a:spcPts val="1620"/>
-              </a:lnSpc>
+                <a:spcPts val="1680"/>
+              </a:lnSpc>
+              <a:spcBef>
+                <a:spcPts val="300"/>
+              </a:spcBef>
               <a:spcAft>
                 <a:spcPts val="300"/>
               </a:spcAft>
@@ -4629,99 +5657,116 @@
                 <a:ea typeface="Georgia" pitchFamily="34" charset="-122"/>
                 <a:cs typeface="Georgia" pitchFamily="34" charset="-120"/>
               </a:rPr>
-              <a:t> Write a 1-paragraph response to "what is gained when philosophy gives an </a:t>
-            </a:r>
+              <a:t>Continuous translation:</a:t>
+            </a:r>
+            <a:endParaRPr lang="en-US" sz="1200" dirty="0"/>
+          </a:p>
+        </p:txBody>
+      </p:sp>
+      <p:sp>
+        <p:nvSpPr>
+          <p:cNvPr id="5" name="Text 3"/>
+          <p:cNvSpPr/>
+          <p:nvPr/>
+        </p:nvSpPr>
+        <p:spPr>
+          <a:xfrm>
+            <a:off x="406301" y="1173063"/>
+            <a:ext cx="8331398" cy="611981"/>
+          </a:xfrm>
+          <a:prstGeom prst="rect">
+            <a:avLst/>
+          </a:prstGeom>
+          <a:solidFill>
+            <a:srgbClr val="FFFFFF"/>
+          </a:solidFill>
+          <a:ln/>
+        </p:spPr>
+        <p:txBody>
+          <a:bodyPr wrap="square" rtlCol="0" anchor="ctr"/>
+          <a:lstStyle/>
+          <a:p>
+            <a:pPr indent="0" marL="0">
+              <a:buNone/>
+            </a:pPr>
+            <a:endParaRPr lang="en-US" dirty="0"/>
+          </a:p>
+        </p:txBody>
+      </p:sp>
+      <p:sp>
+        <p:nvSpPr>
+          <p:cNvPr id="6" name="Shape 4"/>
+          <p:cNvSpPr/>
+          <p:nvPr/>
+        </p:nvSpPr>
+        <p:spPr>
+          <a:xfrm>
+            <a:off x="434876" y="1173063"/>
+            <a:ext cx="0" cy="611981"/>
+          </a:xfrm>
+          <a:prstGeom prst="line">
+            <a:avLst/>
+          </a:prstGeom>
+          <a:noFill/>
+          <a:ln w="57150">
+            <a:solidFill>
+              <a:srgbClr val="997929"/>
+            </a:solidFill>
+            <a:prstDash val="solid"/>
+          </a:ln>
+        </p:spPr>
+      </p:sp>
+      <p:sp>
+        <p:nvSpPr>
+          <p:cNvPr id="7" name="Text 5"/>
+          <p:cNvSpPr/>
+          <p:nvPr/>
+        </p:nvSpPr>
+        <p:spPr>
+          <a:xfrm>
+            <a:off x="692051" y="1363563"/>
+            <a:ext cx="7973389" cy="230981"/>
+          </a:xfrm>
+          <a:prstGeom prst="rect">
+            <a:avLst/>
+          </a:prstGeom>
+          <a:noFill/>
+          <a:ln/>
+        </p:spPr>
+        <p:txBody>
+          <a:bodyPr wrap="square" lIns="0" tIns="0" rIns="0" bIns="0" rtlCol="0" anchor="t"/>
+          <a:lstStyle/>
+          <a:p>
             <a:pPr algn="l" indent="0" marL="0">
               <a:lnSpc>
-                <a:spcPts val="1620"/>
-              </a:lnSpc>
-              <a:spcAft>
-                <a:spcPts val="300"/>
-              </a:spcAft>
-              <a:buNone/>
-            </a:pPr>
-            <a:r>
-              <a:rPr lang="en-US" sz="1200" i="1" dirty="0">
-                <a:solidFill>
-                  <a:srgbClr val="1A1A1A"/>
-                </a:solidFill>
-                <a:latin typeface="Georgia" pitchFamily="34" charset="0"/>
-                <a:ea typeface="Georgia" pitchFamily="34" charset="-122"/>
-                <a:cs typeface="Georgia" pitchFamily="34" charset="-120"/>
-              </a:rPr>
-              <a:t>essence</a:t>
-            </a:r>
-            <a:pPr algn="l" indent="0" marL="0">
-              <a:lnSpc>
-                <a:spcPts val="1620"/>
-              </a:lnSpc>
-              <a:spcAft>
-                <a:spcPts val="300"/>
-              </a:spcAft>
-              <a:buNone/>
-            </a:pPr>
-            <a:r>
-              <a:rPr lang="en-US" sz="1200" dirty="0">
-                <a:solidFill>
-                  <a:srgbClr val="1A1A1A"/>
-                </a:solidFill>
-                <a:latin typeface="Georgia" pitchFamily="34" charset="0"/>
-                <a:ea typeface="Georgia" pitchFamily="34" charset="-122"/>
-                <a:cs typeface="Georgia" pitchFamily="34" charset="-120"/>
-              </a:rPr>
-              <a:t> a name?"</a:t>
-            </a:r>
-            <a:endParaRPr lang="en-US" sz="1200" dirty="0"/>
-          </a:p>
-          <a:p>
-            <a:pPr algn="l" marL="342900" indent="-342900">
-              <a:lnSpc>
-                <a:spcPts val="1620"/>
-              </a:lnSpc>
-              <a:spcAft>
-                <a:spcPts val="300"/>
-              </a:spcAft>
-              <a:buSzPct val="100000"/>
-              <a:buChar char="•"/>
-            </a:pPr>
-            <a:r>
-              <a:rPr lang="en-US" sz="1200" b="1" dirty="0">
-                <a:solidFill>
-                  <a:srgbClr val="1A1A1A"/>
-                </a:solidFill>
-                <a:latin typeface="Georgia" pitchFamily="34" charset="0"/>
-                <a:ea typeface="Georgia" pitchFamily="34" charset="-122"/>
-                <a:cs typeface="Georgia" pitchFamily="34" charset="-120"/>
-              </a:rPr>
-              <a:t>Tier down:</a:t>
-            </a:r>
-            <a:pPr algn="l" indent="0" marL="0">
-              <a:lnSpc>
-                <a:spcPts val="1620"/>
-              </a:lnSpc>
-              <a:spcAft>
-                <a:spcPts val="300"/>
-              </a:spcAft>
-              <a:buNone/>
-            </a:pPr>
-            <a:r>
-              <a:rPr lang="en-US" sz="1200" dirty="0">
-                <a:solidFill>
-                  <a:srgbClr val="1A1A1A"/>
-                </a:solidFill>
-                <a:latin typeface="Georgia" pitchFamily="34" charset="0"/>
-                <a:ea typeface="Georgia" pitchFamily="34" charset="-122"/>
-                <a:cs typeface="Georgia" pitchFamily="34" charset="-120"/>
-              </a:rPr>
-              <a:t> Focus on the meaning. The IAST pronunciation is bonus.</a:t>
-            </a:r>
-            <a:endParaRPr lang="en-US" sz="1200" dirty="0"/>
-          </a:p>
-        </p:txBody>
-      </p:sp>
-      <p:sp>
-        <p:nvSpPr>
-          <p:cNvPr id="5" name="Text 3"/>
+                <a:spcPts val="1820"/>
+              </a:lnSpc>
+              <a:spcBef>
+                <a:spcPts val="300"/>
+              </a:spcBef>
+              <a:spcAft>
+                <a:spcPts val="300"/>
+              </a:spcAft>
+              <a:buNone/>
+            </a:pPr>
+            <a:r>
+              <a:rPr lang="en-US" sz="1300" i="1" dirty="0">
+                <a:solidFill>
+                  <a:srgbClr val="1A1A1A"/>
+                </a:solidFill>
+                <a:latin typeface="Times New Roman" pitchFamily="34" charset="0"/>
+                <a:ea typeface="Times New Roman" pitchFamily="34" charset="-122"/>
+                <a:cs typeface="Times New Roman" pitchFamily="34" charset="-120"/>
+              </a:rPr>
+              <a:t>"Softness, hardness, cold and heat — these are the touch-ness of touch, the subtle essence of air."</a:t>
+            </a:r>
+            <a:endParaRPr lang="en-US" sz="1300" dirty="0"/>
+          </a:p>
+        </p:txBody>
+      </p:sp>
+      <p:sp>
+        <p:nvSpPr>
+          <p:cNvPr id="8" name="Text 6"/>
           <p:cNvSpPr/>
           <p:nvPr/>
         </p:nvSpPr>
@@ -4871,7 +5916,7 @@
                 <a:ea typeface="Times New Roman" pitchFamily="34" charset="-122"/>
                 <a:cs typeface="Times New Roman" pitchFamily="34" charset="-120"/>
               </a:rPr>
-              <a:t>Teacher notes</a:t>
+              <a:t>Reading (15 min) (cont.)</a:t>
             </a:r>
             <a:endParaRPr lang="en-US" sz="1800" dirty="0"/>
           </a:p>
@@ -4885,8 +5930,8 @@
         </p:nvSpPr>
         <p:spPr>
           <a:xfrm>
-            <a:off x="406301" y="870942"/>
-            <a:ext cx="8498026" cy="426541"/>
+            <a:off x="634901" y="883593"/>
+            <a:ext cx="8102798" cy="281880"/>
           </a:xfrm>
           <a:prstGeom prst="rect">
             <a:avLst/>
@@ -4898,13 +5943,121 @@
           <a:bodyPr wrap="square" lIns="0" tIns="0" rIns="0" bIns="0" rtlCol="0" anchor="t"/>
           <a:lstStyle/>
           <a:p>
+            <a:pPr algn="l" marL="342900" indent="-342900">
+              <a:lnSpc>
+                <a:spcPts val="1620"/>
+              </a:lnSpc>
+              <a:spcAft>
+                <a:spcPts val="300"/>
+              </a:spcAft>
+              <a:buSzPct val="100000"/>
+              <a:buChar char="•"/>
+            </a:pPr>
+            <a:r>
+              <a:rPr lang="en-US" sz="1200" b="1" dirty="0">
+                <a:solidFill>
+                  <a:srgbClr val="1A1A1A"/>
+                </a:solidFill>
+                <a:latin typeface="Georgia" pitchFamily="34" charset="0"/>
+                <a:ea typeface="Georgia" pitchFamily="34" charset="-122"/>
+                <a:cs typeface="Georgia" pitchFamily="34" charset="-120"/>
+              </a:rPr>
+              <a:t>Class discussion (8 min):</a:t>
+            </a:r>
+            <a:endParaRPr lang="en-US" sz="1200" dirty="0"/>
+          </a:p>
+        </p:txBody>
+      </p:sp>
+      <p:sp>
+        <p:nvSpPr>
+          <p:cNvPr id="5" name="Text 3"/>
+          <p:cNvSpPr/>
+          <p:nvPr/>
+        </p:nvSpPr>
+        <p:spPr>
+          <a:xfrm>
+            <a:off x="634901" y="1266974"/>
+            <a:ext cx="8102798" cy="975122"/>
+          </a:xfrm>
+          <a:prstGeom prst="rect">
+            <a:avLst/>
+          </a:prstGeom>
+          <a:noFill/>
+          <a:ln/>
+        </p:spPr>
+        <p:txBody>
+          <a:bodyPr wrap="square" lIns="0" tIns="0" rIns="0" bIns="0" rtlCol="0" anchor="t"/>
+          <a:lstStyle/>
+          <a:p>
+            <a:pPr algn="l" marL="342900" indent="-342900">
+              <a:lnSpc>
+                <a:spcPts val="1620"/>
+              </a:lnSpc>
+              <a:spcAft>
+                <a:spcPts val="300"/>
+              </a:spcAft>
+              <a:buSzPct val="100000"/>
+              <a:buChar char="•"/>
+            </a:pPr>
+            <a:r>
+              <a:rPr lang="en-US" sz="1200" dirty="0">
+                <a:solidFill>
+                  <a:srgbClr val="1A1A1A"/>
+                </a:solidFill>
+                <a:latin typeface="Georgia" pitchFamily="34" charset="0"/>
+                <a:ea typeface="Georgia" pitchFamily="34" charset="-122"/>
+                <a:cs typeface="Georgia" pitchFamily="34" charset="-120"/>
+              </a:rPr>
+              <a:t>What surprises you about the categories included under "touch"?</a:t>
+            </a:r>
+            <a:endParaRPr lang="en-US" sz="1200" dirty="0"/>
+          </a:p>
+          <a:p>
+            <a:pPr algn="l" marL="342900" indent="-342900">
+              <a:lnSpc>
+                <a:spcPts val="1620"/>
+              </a:lnSpc>
+              <a:spcAft>
+                <a:spcPts val="300"/>
+              </a:spcAft>
+              <a:buSzPct val="100000"/>
+              <a:buChar char="•"/>
+            </a:pPr>
+            <a:r>
+              <a:rPr lang="en-US" sz="1200" dirty="0">
+                <a:solidFill>
+                  <a:srgbClr val="1A1A1A"/>
+                </a:solidFill>
+                <a:latin typeface="Georgia" pitchFamily="34" charset="0"/>
+                <a:ea typeface="Georgia" pitchFamily="34" charset="-122"/>
+                <a:cs typeface="Georgia" pitchFamily="34" charset="-120"/>
+              </a:rPr>
+              <a:t>Note the philosophical move: </a:t>
+            </a:r>
             <a:pPr algn="l" indent="0" marL="0">
               <a:lnSpc>
-                <a:spcPts val="1680"/>
-              </a:lnSpc>
-              <a:spcBef>
-                <a:spcPts val="300"/>
-              </a:spcBef>
+                <a:spcPts val="1620"/>
+              </a:lnSpc>
+              <a:spcAft>
+                <a:spcPts val="300"/>
+              </a:spcAft>
+              <a:buNone/>
+            </a:pPr>
+            <a:r>
+              <a:rPr lang="en-US" sz="1200" i="1" dirty="0">
+                <a:solidFill>
+                  <a:srgbClr val="1A1A1A"/>
+                </a:solidFill>
+                <a:latin typeface="Georgia" pitchFamily="34" charset="0"/>
+                <a:ea typeface="Georgia" pitchFamily="34" charset="-122"/>
+                <a:cs typeface="Georgia" pitchFamily="34" charset="-120"/>
+              </a:rPr>
+              <a:t>sparśasya sparśatvam</a:t>
+            </a:r>
+            <a:pPr algn="l" indent="0" marL="0">
+              <a:lnSpc>
+                <a:spcPts val="1620"/>
+              </a:lnSpc>
               <a:spcAft>
                 <a:spcPts val="300"/>
               </a:spcAft>
@@ -4919,42 +6072,20 @@
                 <a:ea typeface="Georgia" pitchFamily="34" charset="-122"/>
                 <a:cs typeface="Georgia" pitchFamily="34" charset="-120"/>
               </a:rPr>
-              <a:t>– Don't require pronunciation perfection. The win is </a:t>
-            </a:r>
-            <a:pPr algn="l" indent="0" marL="0">
-              <a:lnSpc>
-                <a:spcPts val="1680"/>
-              </a:lnSpc>
-              <a:spcBef>
-                <a:spcPts val="300"/>
-              </a:spcBef>
-              <a:spcAft>
-                <a:spcPts val="300"/>
-              </a:spcAft>
-              <a:buNone/>
-            </a:pPr>
-            <a:r>
-              <a:rPr lang="en-US" sz="1200" i="1" dirty="0">
-                <a:solidFill>
-                  <a:srgbClr val="1A1A1A"/>
-                </a:solidFill>
-                <a:latin typeface="Georgia" pitchFamily="34" charset="0"/>
-                <a:ea typeface="Georgia" pitchFamily="34" charset="-122"/>
-                <a:cs typeface="Georgia" pitchFamily="34" charset="-120"/>
-              </a:rPr>
-              <a:t>engagement with the meaning at primary-source level</a:t>
-            </a:r>
-            <a:pPr algn="l" indent="0" marL="0">
-              <a:lnSpc>
-                <a:spcPts val="1680"/>
-              </a:lnSpc>
-              <a:spcBef>
-                <a:spcPts val="300"/>
-              </a:spcBef>
-              <a:spcAft>
-                <a:spcPts val="300"/>
-              </a:spcAft>
-              <a:buNone/>
+              <a:t> (touch-ness of touch) — the verse identifies the defining property of a category by giving its essence a name.</a:t>
+            </a:r>
+            <a:endParaRPr lang="en-US" sz="1200" dirty="0"/>
+          </a:p>
+          <a:p>
+            <a:pPr algn="l" marL="342900" indent="-342900">
+              <a:lnSpc>
+                <a:spcPts val="1620"/>
+              </a:lnSpc>
+              <a:spcAft>
+                <a:spcPts val="300"/>
+              </a:spcAft>
+              <a:buSzPct val="100000"/>
+              <a:buChar char="•"/>
             </a:pPr>
             <a:r>
               <a:rPr lang="en-US" sz="1200" dirty="0">
@@ -4965,7 +6096,7 @@
                 <a:ea typeface="Georgia" pitchFamily="34" charset="-122"/>
                 <a:cs typeface="Georgia" pitchFamily="34" charset="-120"/>
               </a:rPr>
-              <a:t>. – This is many students' first time reading a Sanskrit verse. Honour the moment.</a:t>
+              <a:t>How is this different from a modern dictionary definition of "touch"?</a:t>
             </a:r>
             <a:endParaRPr lang="en-US" sz="1200" dirty="0"/>
           </a:p>
@@ -4973,7 +6104,7 @@
       </p:sp>
       <p:sp>
         <p:nvSpPr>
-          <p:cNvPr id="5" name="Text 3"/>
+          <p:cNvPr id="6" name="Text 4"/>
           <p:cNvSpPr/>
           <p:nvPr/>
         </p:nvSpPr>
